--- a/IO-Projekt.pptx
+++ b/IO-Projekt.pptx
@@ -4,22 +4,24 @@
   <p:sldMasterIdLst>
     <p:sldMasterId id="2147483722" r:id="rId4"/>
   </p:sldMasterIdLst>
+  <p:notesMasterIdLst>
+    <p:notesMasterId r:id="rId19"/>
+  </p:notesMasterIdLst>
   <p:sldIdLst>
     <p:sldId id="256" r:id="rId5"/>
     <p:sldId id="257" r:id="rId6"/>
-    <p:sldId id="261" r:id="rId7"/>
-    <p:sldId id="258" r:id="rId8"/>
-    <p:sldId id="260" r:id="rId9"/>
-    <p:sldId id="259" r:id="rId10"/>
-    <p:sldId id="262" r:id="rId11"/>
-    <p:sldId id="263" r:id="rId12"/>
-    <p:sldId id="264" r:id="rId13"/>
-    <p:sldId id="265" r:id="rId14"/>
-    <p:sldId id="266" r:id="rId15"/>
-    <p:sldId id="267" r:id="rId16"/>
-    <p:sldId id="268" r:id="rId17"/>
-    <p:sldId id="269" r:id="rId18"/>
-    <p:sldId id="270" r:id="rId19"/>
+    <p:sldId id="258" r:id="rId7"/>
+    <p:sldId id="259" r:id="rId8"/>
+    <p:sldId id="271" r:id="rId9"/>
+    <p:sldId id="272" r:id="rId10"/>
+    <p:sldId id="273" r:id="rId11"/>
+    <p:sldId id="262" r:id="rId12"/>
+    <p:sldId id="265" r:id="rId13"/>
+    <p:sldId id="266" r:id="rId14"/>
+    <p:sldId id="267" r:id="rId15"/>
+    <p:sldId id="268" r:id="rId16"/>
+    <p:sldId id="269" r:id="rId17"/>
+    <p:sldId id="270" r:id="rId18"/>
   </p:sldIdLst>
   <p:sldSz cx="12192000" cy="6858000"/>
   <p:notesSz cx="6858000" cy="9144000"/>
@@ -118,6 +120,11 @@
       </a:defRPr>
     </a:lvl9pPr>
   </p:defaultTextStyle>
+  <p:extLst>
+    <p:ext uri="{EFAFB233-063F-42B5-8137-9DF3F51BA10A}">
+      <p15:sldGuideLst xmlns:p15="http://schemas.microsoft.com/office/powerpoint/2012/main"/>
+    </p:ext>
+  </p:extLst>
 </p:presentation>
 </file>
 
@@ -127,6 +134,440 @@
     <p1510:client id="{6A8D68A4-760E-43D6-957F-2EC87EF420B1}" v="98" dt="2026-06-14T19:48:23.962"/>
   </p1510:revLst>
 </p1510:revInfo>
+</file>
+
+<file path=ppt/notesMasters/notesMaster1.xml><?xml version="1.0" encoding="utf-8"?>
+<p:notesMaster xmlns:a="http://schemas.openxmlformats.org/drawingml/2006/main" xmlns:r="http://schemas.openxmlformats.org/officeDocument/2006/relationships" xmlns:p="http://schemas.openxmlformats.org/presentationml/2006/main">
+  <p:cSld>
+    <p:bg>
+      <p:bgRef idx="1001">
+        <a:schemeClr val="bg1"/>
+      </p:bgRef>
+    </p:bg>
+    <p:spTree>
+      <p:nvGrpSpPr>
+        <p:cNvPr id="1" name=""/>
+        <p:cNvGrpSpPr/>
+        <p:nvPr/>
+      </p:nvGrpSpPr>
+      <p:grpSpPr>
+        <a:xfrm>
+          <a:off x="0" y="0"/>
+          <a:ext cx="0" cy="0"/>
+          <a:chOff x="0" y="0"/>
+          <a:chExt cx="0" cy="0"/>
+        </a:xfrm>
+      </p:grpSpPr>
+      <p:sp>
+        <p:nvSpPr>
+          <p:cNvPr id="2" name="Symbol zastępczy nagłówka 1"/>
+          <p:cNvSpPr>
+            <a:spLocks noGrp="1"/>
+          </p:cNvSpPr>
+          <p:nvPr>
+            <p:ph type="hdr" sz="quarter"/>
+          </p:nvPr>
+        </p:nvSpPr>
+        <p:spPr>
+          <a:xfrm>
+            <a:off x="0" y="0"/>
+            <a:ext cx="2971800" cy="458788"/>
+          </a:xfrm>
+          <a:prstGeom prst="rect">
+            <a:avLst/>
+          </a:prstGeom>
+        </p:spPr>
+        <p:txBody>
+          <a:bodyPr vert="horz" lIns="91440" tIns="45720" rIns="91440" bIns="45720" rtlCol="0"/>
+          <a:lstStyle>
+            <a:lvl1pPr algn="l">
+              <a:defRPr sz="1200"/>
+            </a:lvl1pPr>
+          </a:lstStyle>
+          <a:p>
+            <a:endParaRPr lang="pl-PL"/>
+          </a:p>
+        </p:txBody>
+      </p:sp>
+      <p:sp>
+        <p:nvSpPr>
+          <p:cNvPr id="3" name="Symbol zastępczy daty 2"/>
+          <p:cNvSpPr>
+            <a:spLocks noGrp="1"/>
+          </p:cNvSpPr>
+          <p:nvPr>
+            <p:ph type="dt" idx="1"/>
+          </p:nvPr>
+        </p:nvSpPr>
+        <p:spPr>
+          <a:xfrm>
+            <a:off x="3884613" y="0"/>
+            <a:ext cx="2971800" cy="458788"/>
+          </a:xfrm>
+          <a:prstGeom prst="rect">
+            <a:avLst/>
+          </a:prstGeom>
+        </p:spPr>
+        <p:txBody>
+          <a:bodyPr vert="horz" lIns="91440" tIns="45720" rIns="91440" bIns="45720" rtlCol="0"/>
+          <a:lstStyle>
+            <a:lvl1pPr algn="r">
+              <a:defRPr sz="1200"/>
+            </a:lvl1pPr>
+          </a:lstStyle>
+          <a:p>
+            <a:fld id="{B62892AE-74DA-4F92-9AC9-CA7FA8BA213D}" type="datetimeFigureOut">
+              <a:rPr lang="pl-PL" smtClean="0"/>
+              <a:t>15.06.2026</a:t>
+            </a:fld>
+            <a:endParaRPr lang="pl-PL"/>
+          </a:p>
+        </p:txBody>
+      </p:sp>
+      <p:sp>
+        <p:nvSpPr>
+          <p:cNvPr id="4" name="Symbol zastępczy obrazu slajdu 3"/>
+          <p:cNvSpPr>
+            <a:spLocks noGrp="1" noRot="1" noChangeAspect="1"/>
+          </p:cNvSpPr>
+          <p:nvPr>
+            <p:ph type="sldImg" idx="2"/>
+          </p:nvPr>
+        </p:nvSpPr>
+        <p:spPr>
+          <a:xfrm>
+            <a:off x="685800" y="1143000"/>
+            <a:ext cx="5486400" cy="3086100"/>
+          </a:xfrm>
+          <a:prstGeom prst="rect">
+            <a:avLst/>
+          </a:prstGeom>
+          <a:noFill/>
+          <a:ln w="12700">
+            <a:solidFill>
+              <a:prstClr val="black"/>
+            </a:solidFill>
+          </a:ln>
+        </p:spPr>
+        <p:txBody>
+          <a:bodyPr vert="horz" lIns="91440" tIns="45720" rIns="91440" bIns="45720" rtlCol="0" anchor="ctr"/>
+          <a:lstStyle/>
+          <a:p>
+            <a:endParaRPr lang="pl-PL"/>
+          </a:p>
+        </p:txBody>
+      </p:sp>
+      <p:sp>
+        <p:nvSpPr>
+          <p:cNvPr id="5" name="Symbol zastępczy notatek 4"/>
+          <p:cNvSpPr>
+            <a:spLocks noGrp="1"/>
+          </p:cNvSpPr>
+          <p:nvPr>
+            <p:ph type="body" sz="quarter" idx="3"/>
+          </p:nvPr>
+        </p:nvSpPr>
+        <p:spPr>
+          <a:xfrm>
+            <a:off x="685800" y="4400550"/>
+            <a:ext cx="5486400" cy="3600450"/>
+          </a:xfrm>
+          <a:prstGeom prst="rect">
+            <a:avLst/>
+          </a:prstGeom>
+        </p:spPr>
+        <p:txBody>
+          <a:bodyPr vert="horz" lIns="91440" tIns="45720" rIns="91440" bIns="45720" rtlCol="0"/>
+          <a:lstStyle/>
+          <a:p>
+            <a:pPr lvl="0"/>
+            <a:r>
+              <a:rPr lang="pl-PL" smtClean="0"/>
+              <a:t>Kliknij, aby edytować style wzorca tekstu</a:t>
+            </a:r>
+          </a:p>
+          <a:p>
+            <a:pPr lvl="1"/>
+            <a:r>
+              <a:rPr lang="pl-PL" smtClean="0"/>
+              <a:t>Drugi poziom</a:t>
+            </a:r>
+          </a:p>
+          <a:p>
+            <a:pPr lvl="2"/>
+            <a:r>
+              <a:rPr lang="pl-PL" smtClean="0"/>
+              <a:t>Trzeci poziom</a:t>
+            </a:r>
+          </a:p>
+          <a:p>
+            <a:pPr lvl="3"/>
+            <a:r>
+              <a:rPr lang="pl-PL" smtClean="0"/>
+              <a:t>Czwarty poziom</a:t>
+            </a:r>
+          </a:p>
+          <a:p>
+            <a:pPr lvl="4"/>
+            <a:r>
+              <a:rPr lang="pl-PL" smtClean="0"/>
+              <a:t>Piąty poziom</a:t>
+            </a:r>
+            <a:endParaRPr lang="pl-PL"/>
+          </a:p>
+        </p:txBody>
+      </p:sp>
+      <p:sp>
+        <p:nvSpPr>
+          <p:cNvPr id="6" name="Symbol zastępczy stopki 5"/>
+          <p:cNvSpPr>
+            <a:spLocks noGrp="1"/>
+          </p:cNvSpPr>
+          <p:nvPr>
+            <p:ph type="ftr" sz="quarter" idx="4"/>
+          </p:nvPr>
+        </p:nvSpPr>
+        <p:spPr>
+          <a:xfrm>
+            <a:off x="0" y="8685213"/>
+            <a:ext cx="2971800" cy="458787"/>
+          </a:xfrm>
+          <a:prstGeom prst="rect">
+            <a:avLst/>
+          </a:prstGeom>
+        </p:spPr>
+        <p:txBody>
+          <a:bodyPr vert="horz" lIns="91440" tIns="45720" rIns="91440" bIns="45720" rtlCol="0" anchor="b"/>
+          <a:lstStyle>
+            <a:lvl1pPr algn="l">
+              <a:defRPr sz="1200"/>
+            </a:lvl1pPr>
+          </a:lstStyle>
+          <a:p>
+            <a:endParaRPr lang="pl-PL"/>
+          </a:p>
+        </p:txBody>
+      </p:sp>
+      <p:sp>
+        <p:nvSpPr>
+          <p:cNvPr id="7" name="Symbol zastępczy numeru slajdu 6"/>
+          <p:cNvSpPr>
+            <a:spLocks noGrp="1"/>
+          </p:cNvSpPr>
+          <p:nvPr>
+            <p:ph type="sldNum" sz="quarter" idx="5"/>
+          </p:nvPr>
+        </p:nvSpPr>
+        <p:spPr>
+          <a:xfrm>
+            <a:off x="3884613" y="8685213"/>
+            <a:ext cx="2971800" cy="458787"/>
+          </a:xfrm>
+          <a:prstGeom prst="rect">
+            <a:avLst/>
+          </a:prstGeom>
+        </p:spPr>
+        <p:txBody>
+          <a:bodyPr vert="horz" lIns="91440" tIns="45720" rIns="91440" bIns="45720" rtlCol="0" anchor="b"/>
+          <a:lstStyle>
+            <a:lvl1pPr algn="r">
+              <a:defRPr sz="1200"/>
+            </a:lvl1pPr>
+          </a:lstStyle>
+          <a:p>
+            <a:fld id="{158230A9-C187-4878-B52A-A71444BA9682}" type="slidenum">
+              <a:rPr lang="pl-PL" smtClean="0"/>
+              <a:t>‹#›</a:t>
+            </a:fld>
+            <a:endParaRPr lang="pl-PL"/>
+          </a:p>
+        </p:txBody>
+      </p:sp>
+    </p:spTree>
+    <p:extLst>
+      <p:ext uri="{BB962C8B-B14F-4D97-AF65-F5344CB8AC3E}">
+        <p14:creationId xmlns:p14="http://schemas.microsoft.com/office/powerpoint/2010/main" val="572104763"/>
+      </p:ext>
+    </p:extLst>
+  </p:cSld>
+  <p:clrMap bg1="lt1" tx1="dk1" bg2="lt2" tx2="dk2" accent1="accent1" accent2="accent2" accent3="accent3" accent4="accent4" accent5="accent5" accent6="accent6" hlink="hlink" folHlink="folHlink"/>
+  <p:notesStyle>
+    <a:lvl1pPr marL="0" algn="l" defTabSz="914400" rtl="0" eaLnBrk="1" latinLnBrk="0" hangingPunct="1">
+      <a:defRPr sz="1200" kern="1200">
+        <a:solidFill>
+          <a:schemeClr val="tx1"/>
+        </a:solidFill>
+        <a:latin typeface="+mn-lt"/>
+        <a:ea typeface="+mn-ea"/>
+        <a:cs typeface="+mn-cs"/>
+      </a:defRPr>
+    </a:lvl1pPr>
+    <a:lvl2pPr marL="457200" algn="l" defTabSz="914400" rtl="0" eaLnBrk="1" latinLnBrk="0" hangingPunct="1">
+      <a:defRPr sz="1200" kern="1200">
+        <a:solidFill>
+          <a:schemeClr val="tx1"/>
+        </a:solidFill>
+        <a:latin typeface="+mn-lt"/>
+        <a:ea typeface="+mn-ea"/>
+        <a:cs typeface="+mn-cs"/>
+      </a:defRPr>
+    </a:lvl2pPr>
+    <a:lvl3pPr marL="914400" algn="l" defTabSz="914400" rtl="0" eaLnBrk="1" latinLnBrk="0" hangingPunct="1">
+      <a:defRPr sz="1200" kern="1200">
+        <a:solidFill>
+          <a:schemeClr val="tx1"/>
+        </a:solidFill>
+        <a:latin typeface="+mn-lt"/>
+        <a:ea typeface="+mn-ea"/>
+        <a:cs typeface="+mn-cs"/>
+      </a:defRPr>
+    </a:lvl3pPr>
+    <a:lvl4pPr marL="1371600" algn="l" defTabSz="914400" rtl="0" eaLnBrk="1" latinLnBrk="0" hangingPunct="1">
+      <a:defRPr sz="1200" kern="1200">
+        <a:solidFill>
+          <a:schemeClr val="tx1"/>
+        </a:solidFill>
+        <a:latin typeface="+mn-lt"/>
+        <a:ea typeface="+mn-ea"/>
+        <a:cs typeface="+mn-cs"/>
+      </a:defRPr>
+    </a:lvl4pPr>
+    <a:lvl5pPr marL="1828800" algn="l" defTabSz="914400" rtl="0" eaLnBrk="1" latinLnBrk="0" hangingPunct="1">
+      <a:defRPr sz="1200" kern="1200">
+        <a:solidFill>
+          <a:schemeClr val="tx1"/>
+        </a:solidFill>
+        <a:latin typeface="+mn-lt"/>
+        <a:ea typeface="+mn-ea"/>
+        <a:cs typeface="+mn-cs"/>
+      </a:defRPr>
+    </a:lvl5pPr>
+    <a:lvl6pPr marL="2286000" algn="l" defTabSz="914400" rtl="0" eaLnBrk="1" latinLnBrk="0" hangingPunct="1">
+      <a:defRPr sz="1200" kern="1200">
+        <a:solidFill>
+          <a:schemeClr val="tx1"/>
+        </a:solidFill>
+        <a:latin typeface="+mn-lt"/>
+        <a:ea typeface="+mn-ea"/>
+        <a:cs typeface="+mn-cs"/>
+      </a:defRPr>
+    </a:lvl6pPr>
+    <a:lvl7pPr marL="2743200" algn="l" defTabSz="914400" rtl="0" eaLnBrk="1" latinLnBrk="0" hangingPunct="1">
+      <a:defRPr sz="1200" kern="1200">
+        <a:solidFill>
+          <a:schemeClr val="tx1"/>
+        </a:solidFill>
+        <a:latin typeface="+mn-lt"/>
+        <a:ea typeface="+mn-ea"/>
+        <a:cs typeface="+mn-cs"/>
+      </a:defRPr>
+    </a:lvl7pPr>
+    <a:lvl8pPr marL="3200400" algn="l" defTabSz="914400" rtl="0" eaLnBrk="1" latinLnBrk="0" hangingPunct="1">
+      <a:defRPr sz="1200" kern="1200">
+        <a:solidFill>
+          <a:schemeClr val="tx1"/>
+        </a:solidFill>
+        <a:latin typeface="+mn-lt"/>
+        <a:ea typeface="+mn-ea"/>
+        <a:cs typeface="+mn-cs"/>
+      </a:defRPr>
+    </a:lvl8pPr>
+    <a:lvl9pPr marL="3657600" algn="l" defTabSz="914400" rtl="0" eaLnBrk="1" latinLnBrk="0" hangingPunct="1">
+      <a:defRPr sz="1200" kern="1200">
+        <a:solidFill>
+          <a:schemeClr val="tx1"/>
+        </a:solidFill>
+        <a:latin typeface="+mn-lt"/>
+        <a:ea typeface="+mn-ea"/>
+        <a:cs typeface="+mn-cs"/>
+      </a:defRPr>
+    </a:lvl9pPr>
+  </p:notesStyle>
+</p:notesMaster>
+</file>
+
+<file path=ppt/notesSlides/notesSlide1.xml><?xml version="1.0" encoding="utf-8"?>
+<p:notes xmlns:a="http://schemas.openxmlformats.org/drawingml/2006/main" xmlns:r="http://schemas.openxmlformats.org/officeDocument/2006/relationships" xmlns:p="http://schemas.openxmlformats.org/presentationml/2006/main">
+  <p:cSld>
+    <p:spTree>
+      <p:nvGrpSpPr>
+        <p:cNvPr id="1" name=""/>
+        <p:cNvGrpSpPr/>
+        <p:nvPr/>
+      </p:nvGrpSpPr>
+      <p:grpSpPr>
+        <a:xfrm>
+          <a:off x="0" y="0"/>
+          <a:ext cx="0" cy="0"/>
+          <a:chOff x="0" y="0"/>
+          <a:chExt cx="0" cy="0"/>
+        </a:xfrm>
+      </p:grpSpPr>
+      <p:sp>
+        <p:nvSpPr>
+          <p:cNvPr id="2" name="Symbol zastępczy obrazu slajdu 1"/>
+          <p:cNvSpPr>
+            <a:spLocks noGrp="1" noRot="1" noChangeAspect="1"/>
+          </p:cNvSpPr>
+          <p:nvPr>
+            <p:ph type="sldImg"/>
+          </p:nvPr>
+        </p:nvSpPr>
+        <p:spPr/>
+      </p:sp>
+      <p:sp>
+        <p:nvSpPr>
+          <p:cNvPr id="3" name="Symbol zastępczy notatek 2"/>
+          <p:cNvSpPr>
+            <a:spLocks noGrp="1"/>
+          </p:cNvSpPr>
+          <p:nvPr>
+            <p:ph type="body" idx="1"/>
+          </p:nvPr>
+        </p:nvSpPr>
+        <p:spPr/>
+        <p:txBody>
+          <a:bodyPr/>
+          <a:lstStyle/>
+          <a:p>
+            <a:endParaRPr lang="pl-PL" dirty="0"/>
+          </a:p>
+        </p:txBody>
+      </p:sp>
+      <p:sp>
+        <p:nvSpPr>
+          <p:cNvPr id="4" name="Symbol zastępczy numeru slajdu 3"/>
+          <p:cNvSpPr>
+            <a:spLocks noGrp="1"/>
+          </p:cNvSpPr>
+          <p:nvPr>
+            <p:ph type="sldNum" sz="quarter" idx="10"/>
+          </p:nvPr>
+        </p:nvSpPr>
+        <p:spPr/>
+        <p:txBody>
+          <a:bodyPr/>
+          <a:lstStyle/>
+          <a:p>
+            <a:fld id="{158230A9-C187-4878-B52A-A71444BA9682}" type="slidenum">
+              <a:rPr lang="pl-PL" smtClean="0"/>
+              <a:t>13</a:t>
+            </a:fld>
+            <a:endParaRPr lang="pl-PL"/>
+          </a:p>
+        </p:txBody>
+      </p:sp>
+    </p:spTree>
+    <p:extLst>
+      <p:ext uri="{BB962C8B-B14F-4D97-AF65-F5344CB8AC3E}">
+        <p14:creationId xmlns:p14="http://schemas.microsoft.com/office/powerpoint/2010/main" val="2436876820"/>
+      </p:ext>
+    </p:extLst>
+  </p:cSld>
+  <p:clrMapOvr>
+    <a:masterClrMapping/>
+  </p:clrMapOvr>
+</p:notes>
 </file>
 
 <file path=ppt/slideLayouts/slideLayout1.xml><?xml version="1.0" encoding="utf-8"?>
@@ -151,7 +592,7 @@
           <p:cNvPr id="2" name="Title 1">
             <a:extLst>
               <a:ext uri="{FF2B5EF4-FFF2-40B4-BE49-F238E27FC236}">
-                <a16:creationId xmlns:a16="http://schemas.microsoft.com/office/drawing/2014/main" id="{B17C81A0-FB7A-4357-8B37-1EC930D1E098}"/>
+                <a16:creationId xmlns:a16="http://schemas.microsoft.com/office/drawing/2014/main" xmlns="" id="{B17C81A0-FB7A-4357-8B37-1EC930D1E098}"/>
               </a:ext>
             </a:extLst>
           </p:cNvPr>
@@ -189,7 +630,7 @@
           <p:cNvPr id="3" name="Subtitle 2">
             <a:extLst>
               <a:ext uri="{FF2B5EF4-FFF2-40B4-BE49-F238E27FC236}">
-                <a16:creationId xmlns:a16="http://schemas.microsoft.com/office/drawing/2014/main" id="{7D3C075C-7238-4F43-87E7-63A35BE6900C}"/>
+                <a16:creationId xmlns:a16="http://schemas.microsoft.com/office/drawing/2014/main" xmlns="" id="{7D3C075C-7238-4F43-87E7-63A35BE6900C}"/>
               </a:ext>
             </a:extLst>
           </p:cNvPr>
@@ -260,7 +701,7 @@
           <p:cNvPr id="4" name="Date Placeholder 3">
             <a:extLst>
               <a:ext uri="{FF2B5EF4-FFF2-40B4-BE49-F238E27FC236}">
-                <a16:creationId xmlns:a16="http://schemas.microsoft.com/office/drawing/2014/main" id="{0AB67EEB-ABA8-4DA9-803B-0C6CD8A1284C}"/>
+                <a16:creationId xmlns:a16="http://schemas.microsoft.com/office/drawing/2014/main" xmlns="" id="{0AB67EEB-ABA8-4DA9-803B-0C6CD8A1284C}"/>
               </a:ext>
             </a:extLst>
           </p:cNvPr>
@@ -278,7 +719,7 @@
           <a:p>
             <a:fld id="{F4D57BDD-E64A-4D27-8978-82FFCA18A12C}" type="datetimeFigureOut">
               <a:rPr lang="en-US" smtClean="0"/>
-              <a:t>6/14/2026</a:t>
+              <a:t>6/15/2026</a:t>
             </a:fld>
             <a:endParaRPr lang="en-US"/>
           </a:p>
@@ -289,7 +730,7 @@
           <p:cNvPr id="5" name="Footer Placeholder 4">
             <a:extLst>
               <a:ext uri="{FF2B5EF4-FFF2-40B4-BE49-F238E27FC236}">
-                <a16:creationId xmlns:a16="http://schemas.microsoft.com/office/drawing/2014/main" id="{0FCFD314-1E75-41B9-A585-4F4A32A347AD}"/>
+                <a16:creationId xmlns:a16="http://schemas.microsoft.com/office/drawing/2014/main" xmlns="" id="{0FCFD314-1E75-41B9-A585-4F4A32A347AD}"/>
               </a:ext>
             </a:extLst>
           </p:cNvPr>
@@ -314,7 +755,7 @@
           <p:cNvPr id="6" name="Slide Number Placeholder 5">
             <a:extLst>
               <a:ext uri="{FF2B5EF4-FFF2-40B4-BE49-F238E27FC236}">
-                <a16:creationId xmlns:a16="http://schemas.microsoft.com/office/drawing/2014/main" id="{0A0CC8E8-C649-4A81-BF53-F078B2A98453}"/>
+                <a16:creationId xmlns:a16="http://schemas.microsoft.com/office/drawing/2014/main" xmlns="" id="{0A0CC8E8-C649-4A81-BF53-F078B2A98453}"/>
               </a:ext>
             </a:extLst>
           </p:cNvPr>
@@ -373,7 +814,7 @@
           <p:cNvPr id="2" name="Title 1">
             <a:extLst>
               <a:ext uri="{FF2B5EF4-FFF2-40B4-BE49-F238E27FC236}">
-                <a16:creationId xmlns:a16="http://schemas.microsoft.com/office/drawing/2014/main" id="{662CE73F-2F7C-4941-9B13-ACB43A4983EC}"/>
+                <a16:creationId xmlns:a16="http://schemas.microsoft.com/office/drawing/2014/main" xmlns="" id="{662CE73F-2F7C-4941-9B13-ACB43A4983EC}"/>
               </a:ext>
             </a:extLst>
           </p:cNvPr>
@@ -407,7 +848,7 @@
           <p:cNvPr id="3" name="Vertical Text Placeholder 2">
             <a:extLst>
               <a:ext uri="{FF2B5EF4-FFF2-40B4-BE49-F238E27FC236}">
-                <a16:creationId xmlns:a16="http://schemas.microsoft.com/office/drawing/2014/main" id="{38BC107E-F2BE-4057-B06B-1E50FD12B561}"/>
+                <a16:creationId xmlns:a16="http://schemas.microsoft.com/office/drawing/2014/main" xmlns="" id="{38BC107E-F2BE-4057-B06B-1E50FD12B561}"/>
               </a:ext>
             </a:extLst>
           </p:cNvPr>
@@ -469,7 +910,7 @@
           <p:cNvPr id="4" name="Date Placeholder 3">
             <a:extLst>
               <a:ext uri="{FF2B5EF4-FFF2-40B4-BE49-F238E27FC236}">
-                <a16:creationId xmlns:a16="http://schemas.microsoft.com/office/drawing/2014/main" id="{23B9D7D8-1932-4215-A6E0-C16DA0DDB8B8}"/>
+                <a16:creationId xmlns:a16="http://schemas.microsoft.com/office/drawing/2014/main" xmlns="" id="{23B9D7D8-1932-4215-A6E0-C16DA0DDB8B8}"/>
               </a:ext>
             </a:extLst>
           </p:cNvPr>
@@ -487,7 +928,7 @@
           <a:p>
             <a:fld id="{F4D57BDD-E64A-4D27-8978-82FFCA18A12C}" type="datetimeFigureOut">
               <a:rPr lang="en-US" smtClean="0"/>
-              <a:t>6/14/2026</a:t>
+              <a:t>6/15/2026</a:t>
             </a:fld>
             <a:endParaRPr lang="en-US"/>
           </a:p>
@@ -498,7 +939,7 @@
           <p:cNvPr id="5" name="Footer Placeholder 4">
             <a:extLst>
               <a:ext uri="{FF2B5EF4-FFF2-40B4-BE49-F238E27FC236}">
-                <a16:creationId xmlns:a16="http://schemas.microsoft.com/office/drawing/2014/main" id="{4378B662-65E3-47B2-AD95-B041B57F3B96}"/>
+                <a16:creationId xmlns:a16="http://schemas.microsoft.com/office/drawing/2014/main" xmlns="" id="{4378B662-65E3-47B2-AD95-B041B57F3B96}"/>
               </a:ext>
             </a:extLst>
           </p:cNvPr>
@@ -523,7 +964,7 @@
           <p:cNvPr id="6" name="Slide Number Placeholder 5">
             <a:extLst>
               <a:ext uri="{FF2B5EF4-FFF2-40B4-BE49-F238E27FC236}">
-                <a16:creationId xmlns:a16="http://schemas.microsoft.com/office/drawing/2014/main" id="{B393DBC5-88B5-4F2A-A0E3-752CB421737A}"/>
+                <a16:creationId xmlns:a16="http://schemas.microsoft.com/office/drawing/2014/main" xmlns="" id="{B393DBC5-88B5-4F2A-A0E3-752CB421737A}"/>
               </a:ext>
             </a:extLst>
           </p:cNvPr>
@@ -582,7 +1023,7 @@
           <p:cNvPr id="2" name="Vertical Title 1">
             <a:extLst>
               <a:ext uri="{FF2B5EF4-FFF2-40B4-BE49-F238E27FC236}">
-                <a16:creationId xmlns:a16="http://schemas.microsoft.com/office/drawing/2014/main" id="{9B6599DF-5B13-4800-ADD7-3A2A2F1C4889}"/>
+                <a16:creationId xmlns:a16="http://schemas.microsoft.com/office/drawing/2014/main" xmlns="" id="{9B6599DF-5B13-4800-ADD7-3A2A2F1C4889}"/>
               </a:ext>
             </a:extLst>
           </p:cNvPr>
@@ -615,7 +1056,7 @@
           <p:cNvPr id="3" name="Vertical Text Placeholder 2">
             <a:extLst>
               <a:ext uri="{FF2B5EF4-FFF2-40B4-BE49-F238E27FC236}">
-                <a16:creationId xmlns:a16="http://schemas.microsoft.com/office/drawing/2014/main" id="{CB191E12-22D9-4DA9-A336-EA6A8B9B55B8}"/>
+                <a16:creationId xmlns:a16="http://schemas.microsoft.com/office/drawing/2014/main" xmlns="" id="{CB191E12-22D9-4DA9-A336-EA6A8B9B55B8}"/>
               </a:ext>
             </a:extLst>
           </p:cNvPr>
@@ -677,7 +1118,7 @@
           <p:cNvPr id="4" name="Date Placeholder 3">
             <a:extLst>
               <a:ext uri="{FF2B5EF4-FFF2-40B4-BE49-F238E27FC236}">
-                <a16:creationId xmlns:a16="http://schemas.microsoft.com/office/drawing/2014/main" id="{F122A1D5-B7EF-43A4-81EF-B5A7EA35616B}"/>
+                <a16:creationId xmlns:a16="http://schemas.microsoft.com/office/drawing/2014/main" xmlns="" id="{F122A1D5-B7EF-43A4-81EF-B5A7EA35616B}"/>
               </a:ext>
             </a:extLst>
           </p:cNvPr>
@@ -695,7 +1136,7 @@
           <a:p>
             <a:fld id="{F4D57BDD-E64A-4D27-8978-82FFCA18A12C}" type="datetimeFigureOut">
               <a:rPr lang="en-US" smtClean="0"/>
-              <a:t>6/14/2026</a:t>
+              <a:t>6/15/2026</a:t>
             </a:fld>
             <a:endParaRPr lang="en-US"/>
           </a:p>
@@ -706,7 +1147,7 @@
           <p:cNvPr id="5" name="Footer Placeholder 4">
             <a:extLst>
               <a:ext uri="{FF2B5EF4-FFF2-40B4-BE49-F238E27FC236}">
-                <a16:creationId xmlns:a16="http://schemas.microsoft.com/office/drawing/2014/main" id="{66809DFB-4410-42BF-B886-C984E3A53FE6}"/>
+                <a16:creationId xmlns:a16="http://schemas.microsoft.com/office/drawing/2014/main" xmlns="" id="{66809DFB-4410-42BF-B886-C984E3A53FE6}"/>
               </a:ext>
             </a:extLst>
           </p:cNvPr>
@@ -731,7 +1172,7 @@
           <p:cNvPr id="6" name="Slide Number Placeholder 5">
             <a:extLst>
               <a:ext uri="{FF2B5EF4-FFF2-40B4-BE49-F238E27FC236}">
-                <a16:creationId xmlns:a16="http://schemas.microsoft.com/office/drawing/2014/main" id="{556487E8-E9A0-429E-88E5-34B1BE86BD23}"/>
+                <a16:creationId xmlns:a16="http://schemas.microsoft.com/office/drawing/2014/main" xmlns="" id="{556487E8-E9A0-429E-88E5-34B1BE86BD23}"/>
               </a:ext>
             </a:extLst>
           </p:cNvPr>
@@ -790,7 +1231,7 @@
           <p:cNvPr id="2" name="Title 1">
             <a:extLst>
               <a:ext uri="{FF2B5EF4-FFF2-40B4-BE49-F238E27FC236}">
-                <a16:creationId xmlns:a16="http://schemas.microsoft.com/office/drawing/2014/main" id="{2A56A6A6-C260-4F8B-99DF-249C907BE516}"/>
+                <a16:creationId xmlns:a16="http://schemas.microsoft.com/office/drawing/2014/main" xmlns="" id="{2A56A6A6-C260-4F8B-99DF-249C907BE516}"/>
               </a:ext>
             </a:extLst>
           </p:cNvPr>
@@ -818,7 +1259,7 @@
           <p:cNvPr id="3" name="Content Placeholder 2">
             <a:extLst>
               <a:ext uri="{FF2B5EF4-FFF2-40B4-BE49-F238E27FC236}">
-                <a16:creationId xmlns:a16="http://schemas.microsoft.com/office/drawing/2014/main" id="{C536F8CB-5C97-4437-A672-4E43D0E5AE83}"/>
+                <a16:creationId xmlns:a16="http://schemas.microsoft.com/office/drawing/2014/main" xmlns="" id="{C536F8CB-5C97-4437-A672-4E43D0E5AE83}"/>
               </a:ext>
             </a:extLst>
           </p:cNvPr>
@@ -875,7 +1316,7 @@
           <p:cNvPr id="4" name="Date Placeholder 3">
             <a:extLst>
               <a:ext uri="{FF2B5EF4-FFF2-40B4-BE49-F238E27FC236}">
-                <a16:creationId xmlns:a16="http://schemas.microsoft.com/office/drawing/2014/main" id="{3A90C990-05C1-4ECD-A899-722057AEA630}"/>
+                <a16:creationId xmlns:a16="http://schemas.microsoft.com/office/drawing/2014/main" xmlns="" id="{3A90C990-05C1-4ECD-A899-722057AEA630}"/>
               </a:ext>
             </a:extLst>
           </p:cNvPr>
@@ -893,7 +1334,7 @@
           <a:p>
             <a:fld id="{F4D57BDD-E64A-4D27-8978-82FFCA18A12C}" type="datetimeFigureOut">
               <a:rPr lang="en-US" smtClean="0"/>
-              <a:t>6/14/2026</a:t>
+              <a:t>6/15/2026</a:t>
             </a:fld>
             <a:endParaRPr lang="en-US"/>
           </a:p>
@@ -904,7 +1345,7 @@
           <p:cNvPr id="5" name="Footer Placeholder 4">
             <a:extLst>
               <a:ext uri="{FF2B5EF4-FFF2-40B4-BE49-F238E27FC236}">
-                <a16:creationId xmlns:a16="http://schemas.microsoft.com/office/drawing/2014/main" id="{C5E9811C-37A0-4DD1-8607-EFD4226E5D60}"/>
+                <a16:creationId xmlns:a16="http://schemas.microsoft.com/office/drawing/2014/main" xmlns="" id="{C5E9811C-37A0-4DD1-8607-EFD4226E5D60}"/>
               </a:ext>
             </a:extLst>
           </p:cNvPr>
@@ -929,7 +1370,7 @@
           <p:cNvPr id="6" name="Slide Number Placeholder 5">
             <a:extLst>
               <a:ext uri="{FF2B5EF4-FFF2-40B4-BE49-F238E27FC236}">
-                <a16:creationId xmlns:a16="http://schemas.microsoft.com/office/drawing/2014/main" id="{14CAB506-9570-4D3E-804F-A184A73DBCE6}"/>
+                <a16:creationId xmlns:a16="http://schemas.microsoft.com/office/drawing/2014/main" xmlns="" id="{14CAB506-9570-4D3E-804F-A184A73DBCE6}"/>
               </a:ext>
             </a:extLst>
           </p:cNvPr>
@@ -988,7 +1429,7 @@
           <p:cNvPr id="2" name="Title 1">
             <a:extLst>
               <a:ext uri="{FF2B5EF4-FFF2-40B4-BE49-F238E27FC236}">
-                <a16:creationId xmlns:a16="http://schemas.microsoft.com/office/drawing/2014/main" id="{54B569B8-DEA4-4F12-9078-ECD731F2AC92}"/>
+                <a16:creationId xmlns:a16="http://schemas.microsoft.com/office/drawing/2014/main" xmlns="" id="{54B569B8-DEA4-4F12-9078-ECD731F2AC92}"/>
               </a:ext>
             </a:extLst>
           </p:cNvPr>
@@ -1026,7 +1467,7 @@
           <p:cNvPr id="3" name="Text Placeholder 2">
             <a:extLst>
               <a:ext uri="{FF2B5EF4-FFF2-40B4-BE49-F238E27FC236}">
-                <a16:creationId xmlns:a16="http://schemas.microsoft.com/office/drawing/2014/main" id="{FA0D1F3B-E79C-4822-999D-205B0E76C66F}"/>
+                <a16:creationId xmlns:a16="http://schemas.microsoft.com/office/drawing/2014/main" xmlns="" id="{FA0D1F3B-E79C-4822-999D-205B0E76C66F}"/>
               </a:ext>
             </a:extLst>
           </p:cNvPr>
@@ -1151,7 +1592,7 @@
           <p:cNvPr id="4" name="Date Placeholder 3">
             <a:extLst>
               <a:ext uri="{FF2B5EF4-FFF2-40B4-BE49-F238E27FC236}">
-                <a16:creationId xmlns:a16="http://schemas.microsoft.com/office/drawing/2014/main" id="{FA145166-621E-4C71-A40F-64E514536729}"/>
+                <a16:creationId xmlns:a16="http://schemas.microsoft.com/office/drawing/2014/main" xmlns="" id="{FA145166-621E-4C71-A40F-64E514536729}"/>
               </a:ext>
             </a:extLst>
           </p:cNvPr>
@@ -1169,7 +1610,7 @@
           <a:p>
             <a:fld id="{F4D57BDD-E64A-4D27-8978-82FFCA18A12C}" type="datetimeFigureOut">
               <a:rPr lang="en-US" smtClean="0"/>
-              <a:t>6/14/2026</a:t>
+              <a:t>6/15/2026</a:t>
             </a:fld>
             <a:endParaRPr lang="en-US"/>
           </a:p>
@@ -1180,7 +1621,7 @@
           <p:cNvPr id="5" name="Footer Placeholder 4">
             <a:extLst>
               <a:ext uri="{FF2B5EF4-FFF2-40B4-BE49-F238E27FC236}">
-                <a16:creationId xmlns:a16="http://schemas.microsoft.com/office/drawing/2014/main" id="{44B8A175-E39F-477F-997B-99FF8677A542}"/>
+                <a16:creationId xmlns:a16="http://schemas.microsoft.com/office/drawing/2014/main" xmlns="" id="{44B8A175-E39F-477F-997B-99FF8677A542}"/>
               </a:ext>
             </a:extLst>
           </p:cNvPr>
@@ -1205,7 +1646,7 @@
           <p:cNvPr id="6" name="Slide Number Placeholder 5">
             <a:extLst>
               <a:ext uri="{FF2B5EF4-FFF2-40B4-BE49-F238E27FC236}">
-                <a16:creationId xmlns:a16="http://schemas.microsoft.com/office/drawing/2014/main" id="{6469115F-5456-4FA3-8484-B1806E7C48C7}"/>
+                <a16:creationId xmlns:a16="http://schemas.microsoft.com/office/drawing/2014/main" xmlns="" id="{6469115F-5456-4FA3-8484-B1806E7C48C7}"/>
               </a:ext>
             </a:extLst>
           </p:cNvPr>
@@ -1264,7 +1705,7 @@
           <p:cNvPr id="2" name="Title 1">
             <a:extLst>
               <a:ext uri="{FF2B5EF4-FFF2-40B4-BE49-F238E27FC236}">
-                <a16:creationId xmlns:a16="http://schemas.microsoft.com/office/drawing/2014/main" id="{2B88BC5C-CCF0-4BA5-B102-213AC6FD5A48}"/>
+                <a16:creationId xmlns:a16="http://schemas.microsoft.com/office/drawing/2014/main" xmlns="" id="{2B88BC5C-CCF0-4BA5-B102-213AC6FD5A48}"/>
               </a:ext>
             </a:extLst>
           </p:cNvPr>
@@ -1298,7 +1739,7 @@
           <p:cNvPr id="3" name="Content Placeholder 2">
             <a:extLst>
               <a:ext uri="{FF2B5EF4-FFF2-40B4-BE49-F238E27FC236}">
-                <a16:creationId xmlns:a16="http://schemas.microsoft.com/office/drawing/2014/main" id="{B2237E63-3B4F-4C2F-A87C-9533227EB684}"/>
+                <a16:creationId xmlns:a16="http://schemas.microsoft.com/office/drawing/2014/main" xmlns="" id="{B2237E63-3B4F-4C2F-A87C-9533227EB684}"/>
               </a:ext>
             </a:extLst>
           </p:cNvPr>
@@ -1361,7 +1802,7 @@
           <p:cNvPr id="4" name="Content Placeholder 3">
             <a:extLst>
               <a:ext uri="{FF2B5EF4-FFF2-40B4-BE49-F238E27FC236}">
-                <a16:creationId xmlns:a16="http://schemas.microsoft.com/office/drawing/2014/main" id="{E78ACE3E-2FED-4289-B138-3EC2826909F5}"/>
+                <a16:creationId xmlns:a16="http://schemas.microsoft.com/office/drawing/2014/main" xmlns="" id="{E78ACE3E-2FED-4289-B138-3EC2826909F5}"/>
               </a:ext>
             </a:extLst>
           </p:cNvPr>
@@ -1423,7 +1864,7 @@
           <p:cNvPr id="5" name="Date Placeholder 4">
             <a:extLst>
               <a:ext uri="{FF2B5EF4-FFF2-40B4-BE49-F238E27FC236}">
-                <a16:creationId xmlns:a16="http://schemas.microsoft.com/office/drawing/2014/main" id="{5555DB51-20DA-4BEF-90BA-DDD37DC080CF}"/>
+                <a16:creationId xmlns:a16="http://schemas.microsoft.com/office/drawing/2014/main" xmlns="" id="{5555DB51-20DA-4BEF-90BA-DDD37DC080CF}"/>
               </a:ext>
             </a:extLst>
           </p:cNvPr>
@@ -1441,7 +1882,7 @@
           <a:p>
             <a:fld id="{F4D57BDD-E64A-4D27-8978-82FFCA18A12C}" type="datetimeFigureOut">
               <a:rPr lang="en-US" smtClean="0"/>
-              <a:t>6/14/2026</a:t>
+              <a:t>6/15/2026</a:t>
             </a:fld>
             <a:endParaRPr lang="en-US"/>
           </a:p>
@@ -1452,7 +1893,7 @@
           <p:cNvPr id="6" name="Footer Placeholder 5">
             <a:extLst>
               <a:ext uri="{FF2B5EF4-FFF2-40B4-BE49-F238E27FC236}">
-                <a16:creationId xmlns:a16="http://schemas.microsoft.com/office/drawing/2014/main" id="{506D22E1-F0DB-4CB7-B2E3-D578EEAA6E57}"/>
+                <a16:creationId xmlns:a16="http://schemas.microsoft.com/office/drawing/2014/main" xmlns="" id="{506D22E1-F0DB-4CB7-B2E3-D578EEAA6E57}"/>
               </a:ext>
             </a:extLst>
           </p:cNvPr>
@@ -1477,7 +1918,7 @@
           <p:cNvPr id="7" name="Slide Number Placeholder 6">
             <a:extLst>
               <a:ext uri="{FF2B5EF4-FFF2-40B4-BE49-F238E27FC236}">
-                <a16:creationId xmlns:a16="http://schemas.microsoft.com/office/drawing/2014/main" id="{CC29146B-54D6-4291-8EA2-6430024824AE}"/>
+                <a16:creationId xmlns:a16="http://schemas.microsoft.com/office/drawing/2014/main" xmlns="" id="{CC29146B-54D6-4291-8EA2-6430024824AE}"/>
               </a:ext>
             </a:extLst>
           </p:cNvPr>
@@ -1536,7 +1977,7 @@
           <p:cNvPr id="2" name="Title 1">
             <a:extLst>
               <a:ext uri="{FF2B5EF4-FFF2-40B4-BE49-F238E27FC236}">
-                <a16:creationId xmlns:a16="http://schemas.microsoft.com/office/drawing/2014/main" id="{7E5B4AE7-507A-4E14-96E2-5412FF8EA283}"/>
+                <a16:creationId xmlns:a16="http://schemas.microsoft.com/office/drawing/2014/main" xmlns="" id="{7E5B4AE7-507A-4E14-96E2-5412FF8EA283}"/>
               </a:ext>
             </a:extLst>
           </p:cNvPr>
@@ -1570,7 +2011,7 @@
           <p:cNvPr id="3" name="Text Placeholder 2">
             <a:extLst>
               <a:ext uri="{FF2B5EF4-FFF2-40B4-BE49-F238E27FC236}">
-                <a16:creationId xmlns:a16="http://schemas.microsoft.com/office/drawing/2014/main" id="{7EDEEE83-2945-4C22-9597-57F1F1262841}"/>
+                <a16:creationId xmlns:a16="http://schemas.microsoft.com/office/drawing/2014/main" xmlns="" id="{7EDEEE83-2945-4C22-9597-57F1F1262841}"/>
               </a:ext>
             </a:extLst>
           </p:cNvPr>
@@ -1641,7 +2082,7 @@
           <p:cNvPr id="4" name="Content Placeholder 3">
             <a:extLst>
               <a:ext uri="{FF2B5EF4-FFF2-40B4-BE49-F238E27FC236}">
-                <a16:creationId xmlns:a16="http://schemas.microsoft.com/office/drawing/2014/main" id="{8CC2494D-AD1D-4CB7-A17C-B69079113D71}"/>
+                <a16:creationId xmlns:a16="http://schemas.microsoft.com/office/drawing/2014/main" xmlns="" id="{8CC2494D-AD1D-4CB7-A17C-B69079113D71}"/>
               </a:ext>
             </a:extLst>
           </p:cNvPr>
@@ -1704,7 +2145,7 @@
           <p:cNvPr id="5" name="Text Placeholder 4">
             <a:extLst>
               <a:ext uri="{FF2B5EF4-FFF2-40B4-BE49-F238E27FC236}">
-                <a16:creationId xmlns:a16="http://schemas.microsoft.com/office/drawing/2014/main" id="{B23E4950-830D-4EE3-9F51-DD730255E0CD}"/>
+                <a16:creationId xmlns:a16="http://schemas.microsoft.com/office/drawing/2014/main" xmlns="" id="{B23E4950-830D-4EE3-9F51-DD730255E0CD}"/>
               </a:ext>
             </a:extLst>
           </p:cNvPr>
@@ -1775,7 +2216,7 @@
           <p:cNvPr id="6" name="Content Placeholder 5">
             <a:extLst>
               <a:ext uri="{FF2B5EF4-FFF2-40B4-BE49-F238E27FC236}">
-                <a16:creationId xmlns:a16="http://schemas.microsoft.com/office/drawing/2014/main" id="{36F244AA-BDAA-4FDD-B742-449DF905730C}"/>
+                <a16:creationId xmlns:a16="http://schemas.microsoft.com/office/drawing/2014/main" xmlns="" id="{36F244AA-BDAA-4FDD-B742-449DF905730C}"/>
               </a:ext>
             </a:extLst>
           </p:cNvPr>
@@ -1837,7 +2278,7 @@
           <p:cNvPr id="7" name="Date Placeholder 6">
             <a:extLst>
               <a:ext uri="{FF2B5EF4-FFF2-40B4-BE49-F238E27FC236}">
-                <a16:creationId xmlns:a16="http://schemas.microsoft.com/office/drawing/2014/main" id="{56B78494-ECE0-41D2-97E2-CFAC0434A8B8}"/>
+                <a16:creationId xmlns:a16="http://schemas.microsoft.com/office/drawing/2014/main" xmlns="" id="{56B78494-ECE0-41D2-97E2-CFAC0434A8B8}"/>
               </a:ext>
             </a:extLst>
           </p:cNvPr>
@@ -1855,7 +2296,7 @@
           <a:p>
             <a:fld id="{F4D57BDD-E64A-4D27-8978-82FFCA18A12C}" type="datetimeFigureOut">
               <a:rPr lang="en-US" smtClean="0"/>
-              <a:t>6/14/2026</a:t>
+              <a:t>6/15/2026</a:t>
             </a:fld>
             <a:endParaRPr lang="en-US"/>
           </a:p>
@@ -1866,7 +2307,7 @@
           <p:cNvPr id="8" name="Footer Placeholder 7">
             <a:extLst>
               <a:ext uri="{FF2B5EF4-FFF2-40B4-BE49-F238E27FC236}">
-                <a16:creationId xmlns:a16="http://schemas.microsoft.com/office/drawing/2014/main" id="{185E4C20-6CC5-4259-B554-B19F1A7AA059}"/>
+                <a16:creationId xmlns:a16="http://schemas.microsoft.com/office/drawing/2014/main" xmlns="" id="{185E4C20-6CC5-4259-B554-B19F1A7AA059}"/>
               </a:ext>
             </a:extLst>
           </p:cNvPr>
@@ -1891,7 +2332,7 @@
           <p:cNvPr id="9" name="Slide Number Placeholder 8">
             <a:extLst>
               <a:ext uri="{FF2B5EF4-FFF2-40B4-BE49-F238E27FC236}">
-                <a16:creationId xmlns:a16="http://schemas.microsoft.com/office/drawing/2014/main" id="{CB09AB13-CCCC-4074-9B66-CE0B37902E3F}"/>
+                <a16:creationId xmlns:a16="http://schemas.microsoft.com/office/drawing/2014/main" xmlns="" id="{CB09AB13-CCCC-4074-9B66-CE0B37902E3F}"/>
               </a:ext>
             </a:extLst>
           </p:cNvPr>
@@ -1950,7 +2391,7 @@
           <p:cNvPr id="2" name="Title 1">
             <a:extLst>
               <a:ext uri="{FF2B5EF4-FFF2-40B4-BE49-F238E27FC236}">
-                <a16:creationId xmlns:a16="http://schemas.microsoft.com/office/drawing/2014/main" id="{57EFB5FF-4FD1-4CE4-BBC5-E6402FE06F0C}"/>
+                <a16:creationId xmlns:a16="http://schemas.microsoft.com/office/drawing/2014/main" xmlns="" id="{57EFB5FF-4FD1-4CE4-BBC5-E6402FE06F0C}"/>
               </a:ext>
             </a:extLst>
           </p:cNvPr>
@@ -1984,7 +2425,7 @@
           <p:cNvPr id="3" name="Date Placeholder 2">
             <a:extLst>
               <a:ext uri="{FF2B5EF4-FFF2-40B4-BE49-F238E27FC236}">
-                <a16:creationId xmlns:a16="http://schemas.microsoft.com/office/drawing/2014/main" id="{F9E71AAD-C5B9-485B-84DD-60DAFD5F18BC}"/>
+                <a16:creationId xmlns:a16="http://schemas.microsoft.com/office/drawing/2014/main" xmlns="" id="{F9E71AAD-C5B9-485B-84DD-60DAFD5F18BC}"/>
               </a:ext>
             </a:extLst>
           </p:cNvPr>
@@ -2002,7 +2443,7 @@
           <a:p>
             <a:fld id="{F4D57BDD-E64A-4D27-8978-82FFCA18A12C}" type="datetimeFigureOut">
               <a:rPr lang="en-US" smtClean="0"/>
-              <a:t>6/14/2026</a:t>
+              <a:t>6/15/2026</a:t>
             </a:fld>
             <a:endParaRPr lang="en-US"/>
           </a:p>
@@ -2013,7 +2454,7 @@
           <p:cNvPr id="4" name="Footer Placeholder 3">
             <a:extLst>
               <a:ext uri="{FF2B5EF4-FFF2-40B4-BE49-F238E27FC236}">
-                <a16:creationId xmlns:a16="http://schemas.microsoft.com/office/drawing/2014/main" id="{9B7CACFF-0406-4EE2-9E8F-F594B952C265}"/>
+                <a16:creationId xmlns:a16="http://schemas.microsoft.com/office/drawing/2014/main" xmlns="" id="{9B7CACFF-0406-4EE2-9E8F-F594B952C265}"/>
               </a:ext>
             </a:extLst>
           </p:cNvPr>
@@ -2038,7 +2479,7 @@
           <p:cNvPr id="5" name="Slide Number Placeholder 4">
             <a:extLst>
               <a:ext uri="{FF2B5EF4-FFF2-40B4-BE49-F238E27FC236}">
-                <a16:creationId xmlns:a16="http://schemas.microsoft.com/office/drawing/2014/main" id="{B552A47E-1990-4B6B-BCCB-75B6F213A8ED}"/>
+                <a16:creationId xmlns:a16="http://schemas.microsoft.com/office/drawing/2014/main" xmlns="" id="{B552A47E-1990-4B6B-BCCB-75B6F213A8ED}"/>
               </a:ext>
             </a:extLst>
           </p:cNvPr>
@@ -2097,7 +2538,7 @@
           <p:cNvPr id="2" name="Date Placeholder 1">
             <a:extLst>
               <a:ext uri="{FF2B5EF4-FFF2-40B4-BE49-F238E27FC236}">
-                <a16:creationId xmlns:a16="http://schemas.microsoft.com/office/drawing/2014/main" id="{AEC8FE4C-64F1-4C88-9D30-17F8131ED627}"/>
+                <a16:creationId xmlns:a16="http://schemas.microsoft.com/office/drawing/2014/main" xmlns="" id="{AEC8FE4C-64F1-4C88-9D30-17F8131ED627}"/>
               </a:ext>
             </a:extLst>
           </p:cNvPr>
@@ -2115,7 +2556,7 @@
           <a:p>
             <a:fld id="{F4D57BDD-E64A-4D27-8978-82FFCA18A12C}" type="datetimeFigureOut">
               <a:rPr lang="en-US" smtClean="0"/>
-              <a:t>6/14/2026</a:t>
+              <a:t>6/15/2026</a:t>
             </a:fld>
             <a:endParaRPr lang="en-US"/>
           </a:p>
@@ -2126,7 +2567,7 @@
           <p:cNvPr id="3" name="Footer Placeholder 2">
             <a:extLst>
               <a:ext uri="{FF2B5EF4-FFF2-40B4-BE49-F238E27FC236}">
-                <a16:creationId xmlns:a16="http://schemas.microsoft.com/office/drawing/2014/main" id="{D25D8FB3-6FA4-40A7-BDBF-76CD0F22FEAB}"/>
+                <a16:creationId xmlns:a16="http://schemas.microsoft.com/office/drawing/2014/main" xmlns="" id="{D25D8FB3-6FA4-40A7-BDBF-76CD0F22FEAB}"/>
               </a:ext>
             </a:extLst>
           </p:cNvPr>
@@ -2151,7 +2592,7 @@
           <p:cNvPr id="4" name="Slide Number Placeholder 3">
             <a:extLst>
               <a:ext uri="{FF2B5EF4-FFF2-40B4-BE49-F238E27FC236}">
-                <a16:creationId xmlns:a16="http://schemas.microsoft.com/office/drawing/2014/main" id="{66649F41-A021-4490-BB80-C89DF0293708}"/>
+                <a16:creationId xmlns:a16="http://schemas.microsoft.com/office/drawing/2014/main" xmlns="" id="{66649F41-A021-4490-BB80-C89DF0293708}"/>
               </a:ext>
             </a:extLst>
           </p:cNvPr>
@@ -2210,7 +2651,7 @@
           <p:cNvPr id="2" name="Title 1">
             <a:extLst>
               <a:ext uri="{FF2B5EF4-FFF2-40B4-BE49-F238E27FC236}">
-                <a16:creationId xmlns:a16="http://schemas.microsoft.com/office/drawing/2014/main" id="{057CEF60-874B-45DE-BF65-CF0D08577588}"/>
+                <a16:creationId xmlns:a16="http://schemas.microsoft.com/office/drawing/2014/main" xmlns="" id="{057CEF60-874B-45DE-BF65-CF0D08577588}"/>
               </a:ext>
             </a:extLst>
           </p:cNvPr>
@@ -2248,7 +2689,7 @@
           <p:cNvPr id="3" name="Content Placeholder 2">
             <a:extLst>
               <a:ext uri="{FF2B5EF4-FFF2-40B4-BE49-F238E27FC236}">
-                <a16:creationId xmlns:a16="http://schemas.microsoft.com/office/drawing/2014/main" id="{1CD757B0-722D-425F-8BD4-9CD9093BCBF5}"/>
+                <a16:creationId xmlns:a16="http://schemas.microsoft.com/office/drawing/2014/main" xmlns="" id="{1CD757B0-722D-425F-8BD4-9CD9093BCBF5}"/>
               </a:ext>
             </a:extLst>
           </p:cNvPr>
@@ -2338,7 +2779,7 @@
           <p:cNvPr id="4" name="Text Placeholder 3">
             <a:extLst>
               <a:ext uri="{FF2B5EF4-FFF2-40B4-BE49-F238E27FC236}">
-                <a16:creationId xmlns:a16="http://schemas.microsoft.com/office/drawing/2014/main" id="{4EDB0F60-AADF-41C3-8BFC-B405E0A3F9AC}"/>
+                <a16:creationId xmlns:a16="http://schemas.microsoft.com/office/drawing/2014/main" xmlns="" id="{4EDB0F60-AADF-41C3-8BFC-B405E0A3F9AC}"/>
               </a:ext>
             </a:extLst>
           </p:cNvPr>
@@ -2409,7 +2850,7 @@
           <p:cNvPr id="5" name="Date Placeholder 4">
             <a:extLst>
               <a:ext uri="{FF2B5EF4-FFF2-40B4-BE49-F238E27FC236}">
-                <a16:creationId xmlns:a16="http://schemas.microsoft.com/office/drawing/2014/main" id="{CFAB1E11-97B6-42FD-9F45-6EDC3B83FABD}"/>
+                <a16:creationId xmlns:a16="http://schemas.microsoft.com/office/drawing/2014/main" xmlns="" id="{CFAB1E11-97B6-42FD-9F45-6EDC3B83FABD}"/>
               </a:ext>
             </a:extLst>
           </p:cNvPr>
@@ -2427,7 +2868,7 @@
           <a:p>
             <a:fld id="{F4D57BDD-E64A-4D27-8978-82FFCA18A12C}" type="datetimeFigureOut">
               <a:rPr lang="en-US" smtClean="0"/>
-              <a:t>6/14/2026</a:t>
+              <a:t>6/15/2026</a:t>
             </a:fld>
             <a:endParaRPr lang="en-US"/>
           </a:p>
@@ -2438,7 +2879,7 @@
           <p:cNvPr id="6" name="Footer Placeholder 5">
             <a:extLst>
               <a:ext uri="{FF2B5EF4-FFF2-40B4-BE49-F238E27FC236}">
-                <a16:creationId xmlns:a16="http://schemas.microsoft.com/office/drawing/2014/main" id="{E14D7DA9-F910-4337-99A2-91F4EA3612EC}"/>
+                <a16:creationId xmlns:a16="http://schemas.microsoft.com/office/drawing/2014/main" xmlns="" id="{E14D7DA9-F910-4337-99A2-91F4EA3612EC}"/>
               </a:ext>
             </a:extLst>
           </p:cNvPr>
@@ -2463,7 +2904,7 @@
           <p:cNvPr id="7" name="Slide Number Placeholder 6">
             <a:extLst>
               <a:ext uri="{FF2B5EF4-FFF2-40B4-BE49-F238E27FC236}">
-                <a16:creationId xmlns:a16="http://schemas.microsoft.com/office/drawing/2014/main" id="{AB93A2F2-339E-4406-9A90-534A38C5A069}"/>
+                <a16:creationId xmlns:a16="http://schemas.microsoft.com/office/drawing/2014/main" xmlns="" id="{AB93A2F2-339E-4406-9A90-534A38C5A069}"/>
               </a:ext>
             </a:extLst>
           </p:cNvPr>
@@ -2522,7 +2963,7 @@
           <p:cNvPr id="2" name="Title 1">
             <a:extLst>
               <a:ext uri="{FF2B5EF4-FFF2-40B4-BE49-F238E27FC236}">
-                <a16:creationId xmlns:a16="http://schemas.microsoft.com/office/drawing/2014/main" id="{59971599-6E07-4A55-9B93-4CA5EFE3FD76}"/>
+                <a16:creationId xmlns:a16="http://schemas.microsoft.com/office/drawing/2014/main" xmlns="" id="{59971599-6E07-4A55-9B93-4CA5EFE3FD76}"/>
               </a:ext>
             </a:extLst>
           </p:cNvPr>
@@ -2559,7 +3000,7 @@
           <p:cNvPr id="3" name="Picture Placeholder 2">
             <a:extLst>
               <a:ext uri="{FF2B5EF4-FFF2-40B4-BE49-F238E27FC236}">
-                <a16:creationId xmlns:a16="http://schemas.microsoft.com/office/drawing/2014/main" id="{292C2D26-DACA-4941-955E-18F7E236758C}"/>
+                <a16:creationId xmlns:a16="http://schemas.microsoft.com/office/drawing/2014/main" xmlns="" id="{292C2D26-DACA-4941-955E-18F7E236758C}"/>
               </a:ext>
             </a:extLst>
           </p:cNvPr>
@@ -2629,7 +3070,7 @@
           <p:cNvPr id="4" name="Text Placeholder 3">
             <a:extLst>
               <a:ext uri="{FF2B5EF4-FFF2-40B4-BE49-F238E27FC236}">
-                <a16:creationId xmlns:a16="http://schemas.microsoft.com/office/drawing/2014/main" id="{27EDB26D-C5B0-41D6-A75F-F89A87BE243A}"/>
+                <a16:creationId xmlns:a16="http://schemas.microsoft.com/office/drawing/2014/main" xmlns="" id="{27EDB26D-C5B0-41D6-A75F-F89A87BE243A}"/>
               </a:ext>
             </a:extLst>
           </p:cNvPr>
@@ -2700,7 +3141,7 @@
           <p:cNvPr id="5" name="Date Placeholder 4">
             <a:extLst>
               <a:ext uri="{FF2B5EF4-FFF2-40B4-BE49-F238E27FC236}">
-                <a16:creationId xmlns:a16="http://schemas.microsoft.com/office/drawing/2014/main" id="{779304B6-48DF-41FA-A089-8C83BBA63673}"/>
+                <a16:creationId xmlns:a16="http://schemas.microsoft.com/office/drawing/2014/main" xmlns="" id="{779304B6-48DF-41FA-A089-8C83BBA63673}"/>
               </a:ext>
             </a:extLst>
           </p:cNvPr>
@@ -2718,7 +3159,7 @@
           <a:p>
             <a:fld id="{F4D57BDD-E64A-4D27-8978-82FFCA18A12C}" type="datetimeFigureOut">
               <a:rPr lang="en-US" smtClean="0"/>
-              <a:t>6/14/2026</a:t>
+              <a:t>6/15/2026</a:t>
             </a:fld>
             <a:endParaRPr lang="en-US"/>
           </a:p>
@@ -2729,7 +3170,7 @@
           <p:cNvPr id="6" name="Footer Placeholder 5">
             <a:extLst>
               <a:ext uri="{FF2B5EF4-FFF2-40B4-BE49-F238E27FC236}">
-                <a16:creationId xmlns:a16="http://schemas.microsoft.com/office/drawing/2014/main" id="{14DFB82F-A17A-4BC7-A522-CD934BC35C9E}"/>
+                <a16:creationId xmlns:a16="http://schemas.microsoft.com/office/drawing/2014/main" xmlns="" id="{14DFB82F-A17A-4BC7-A522-CD934BC35C9E}"/>
               </a:ext>
             </a:extLst>
           </p:cNvPr>
@@ -2754,7 +3195,7 @@
           <p:cNvPr id="7" name="Slide Number Placeholder 6">
             <a:extLst>
               <a:ext uri="{FF2B5EF4-FFF2-40B4-BE49-F238E27FC236}">
-                <a16:creationId xmlns:a16="http://schemas.microsoft.com/office/drawing/2014/main" id="{75CC530C-8824-4BE3-884E-2AFF30B572BC}"/>
+                <a16:creationId xmlns:a16="http://schemas.microsoft.com/office/drawing/2014/main" xmlns="" id="{75CC530C-8824-4BE3-884E-2AFF30B572BC}"/>
               </a:ext>
             </a:extLst>
           </p:cNvPr>
@@ -2818,7 +3259,7 @@
           <p:cNvPr id="2" name="Title Placeholder 1">
             <a:extLst>
               <a:ext uri="{FF2B5EF4-FFF2-40B4-BE49-F238E27FC236}">
-                <a16:creationId xmlns:a16="http://schemas.microsoft.com/office/drawing/2014/main" id="{481B49B9-8C94-4604-AEEE-CB5051962D27}"/>
+                <a16:creationId xmlns:a16="http://schemas.microsoft.com/office/drawing/2014/main" xmlns="" id="{481B49B9-8C94-4604-AEEE-CB5051962D27}"/>
               </a:ext>
             </a:extLst>
           </p:cNvPr>
@@ -2857,7 +3298,7 @@
           <p:cNvPr id="3" name="Text Placeholder 2">
             <a:extLst>
               <a:ext uri="{FF2B5EF4-FFF2-40B4-BE49-F238E27FC236}">
-                <a16:creationId xmlns:a16="http://schemas.microsoft.com/office/drawing/2014/main" id="{79C3204E-CAF5-48A1-928F-757507EC48C4}"/>
+                <a16:creationId xmlns:a16="http://schemas.microsoft.com/office/drawing/2014/main" xmlns="" id="{79C3204E-CAF5-48A1-928F-757507EC48C4}"/>
               </a:ext>
             </a:extLst>
           </p:cNvPr>
@@ -2925,7 +3366,7 @@
           <p:cNvPr id="4" name="Date Placeholder 3">
             <a:extLst>
               <a:ext uri="{FF2B5EF4-FFF2-40B4-BE49-F238E27FC236}">
-                <a16:creationId xmlns:a16="http://schemas.microsoft.com/office/drawing/2014/main" id="{09540D12-4B42-4790-8677-C9250F3CDDCF}"/>
+                <a16:creationId xmlns:a16="http://schemas.microsoft.com/office/drawing/2014/main" xmlns="" id="{09540D12-4B42-4790-8677-C9250F3CDDCF}"/>
               </a:ext>
             </a:extLst>
           </p:cNvPr>
@@ -2960,7 +3401,7 @@
             <a:fld id="{F4D57BDD-E64A-4D27-8978-82FFCA18A12C}" type="datetimeFigureOut">
               <a:rPr lang="en-US" smtClean="0"/>
               <a:pPr/>
-              <a:t>6/14/2026</a:t>
+              <a:t>6/15/2026</a:t>
             </a:fld>
             <a:endParaRPr lang="en-US" dirty="0"/>
           </a:p>
@@ -2971,7 +3412,7 @@
           <p:cNvPr id="5" name="Footer Placeholder 4">
             <a:extLst>
               <a:ext uri="{FF2B5EF4-FFF2-40B4-BE49-F238E27FC236}">
-                <a16:creationId xmlns:a16="http://schemas.microsoft.com/office/drawing/2014/main" id="{022B17CD-6C27-4CD1-B20D-EA4B8E54F4FD}"/>
+                <a16:creationId xmlns:a16="http://schemas.microsoft.com/office/drawing/2014/main" xmlns="" id="{022B17CD-6C27-4CD1-B20D-EA4B8E54F4FD}"/>
               </a:ext>
             </a:extLst>
           </p:cNvPr>
@@ -3012,7 +3453,7 @@
           <p:cNvPr id="6" name="Slide Number Placeholder 5">
             <a:extLst>
               <a:ext uri="{FF2B5EF4-FFF2-40B4-BE49-F238E27FC236}">
-                <a16:creationId xmlns:a16="http://schemas.microsoft.com/office/drawing/2014/main" id="{C03A934F-C817-4C99-A2CF-C763A3F20627}"/>
+                <a16:creationId xmlns:a16="http://schemas.microsoft.com/office/drawing/2014/main" xmlns="" id="{C03A934F-C817-4C99-A2CF-C763A3F20627}"/>
               </a:ext>
             </a:extLst>
           </p:cNvPr>
@@ -3388,10 +3829,10 @@
           <p:cNvPr id="5" name="Rectangle 8">
             <a:extLst>
               <a:ext uri="{FF2B5EF4-FFF2-40B4-BE49-F238E27FC236}">
-                <a16:creationId xmlns:a16="http://schemas.microsoft.com/office/drawing/2014/main" id="{9B37791B-B040-4694-BFDC-8DD132D86E8E}"/>
+                <a16:creationId xmlns:a16="http://schemas.microsoft.com/office/drawing/2014/main" xmlns="" id="{9B37791B-B040-4694-BFDC-8DD132D86E8E}"/>
               </a:ext>
               <a:ext uri="{C183D7F6-B498-43B3-948B-1728B52AA6E4}">
-                <adec:decorative xmlns:adec="http://schemas.microsoft.com/office/drawing/2017/decorative" val="1"/>
+                <adec:decorative xmlns:adec="http://schemas.microsoft.com/office/drawing/2017/decorative" xmlns="" val="1"/>
               </a:ext>
             </a:extLst>
           </p:cNvPr>
@@ -3401,7 +3842,7 @@
           <p:nvPr>
             <p:extLst>
               <p:ext uri="{386F3935-93C4-4BCD-93E2-E3B085C9AB24}">
-                <p16:designElem xmlns:p16="http://schemas.microsoft.com/office/powerpoint/2015/main" val="1"/>
+                <p16:designElem xmlns:p16="http://schemas.microsoft.com/office/powerpoint/2015/main" xmlns="" val="1"/>
               </p:ext>
             </p:extLst>
           </p:nvPr>
@@ -3451,7 +3892,7 @@
           <p:cNvPr id="2" name="Tytuł 1">
             <a:extLst>
               <a:ext uri="{FF2B5EF4-FFF2-40B4-BE49-F238E27FC236}">
-                <a16:creationId xmlns:a16="http://schemas.microsoft.com/office/drawing/2014/main" id="{1328041B-1C4E-8608-70E9-E97235D52900}"/>
+                <a16:creationId xmlns:a16="http://schemas.microsoft.com/office/drawing/2014/main" xmlns="" id="{1328041B-1C4E-8608-70E9-E97235D52900}"/>
               </a:ext>
             </a:extLst>
           </p:cNvPr>
@@ -3487,7 +3928,7 @@
           <p:cNvPr id="3" name="Podtytuł 2">
             <a:extLst>
               <a:ext uri="{FF2B5EF4-FFF2-40B4-BE49-F238E27FC236}">
-                <a16:creationId xmlns:a16="http://schemas.microsoft.com/office/drawing/2014/main" id="{A8E1C71C-18AB-EE96-AB0F-B832BD7CE74B}"/>
+                <a16:creationId xmlns:a16="http://schemas.microsoft.com/office/drawing/2014/main" xmlns="" id="{A8E1C71C-18AB-EE96-AB0F-B832BD7CE74B}"/>
               </a:ext>
             </a:extLst>
           </p:cNvPr>
@@ -3537,7 +3978,7 @@
           <p:cNvPr id="6" name="Picture 3">
             <a:extLst>
               <a:ext uri="{FF2B5EF4-FFF2-40B4-BE49-F238E27FC236}">
-                <a16:creationId xmlns:a16="http://schemas.microsoft.com/office/drawing/2014/main" id="{11C892B7-4FF5-26B8-9114-B29FA835F244}"/>
+                <a16:creationId xmlns:a16="http://schemas.microsoft.com/office/drawing/2014/main" xmlns="" id="{11C892B7-4FF5-26B8-9114-B29FA835F244}"/>
               </a:ext>
             </a:extLst>
           </p:cNvPr>
@@ -5401,10 +5842,10 @@
           <p:cNvPr id="7" name="Group 10">
             <a:extLst>
               <a:ext uri="{FF2B5EF4-FFF2-40B4-BE49-F238E27FC236}">
-                <a16:creationId xmlns:a16="http://schemas.microsoft.com/office/drawing/2014/main" id="{564DEED3-BC52-4F15-8426-D33275CB0111}"/>
+                <a16:creationId xmlns:a16="http://schemas.microsoft.com/office/drawing/2014/main" xmlns="" id="{564DEED3-BC52-4F15-8426-D33275CB0111}"/>
               </a:ext>
               <a:ext uri="{C183D7F6-B498-43B3-948B-1728B52AA6E4}">
-                <adec:decorative xmlns:adec="http://schemas.microsoft.com/office/drawing/2017/decorative" val="1"/>
+                <adec:decorative xmlns:adec="http://schemas.microsoft.com/office/drawing/2017/decorative" xmlns="" val="1"/>
               </a:ext>
             </a:extLst>
           </p:cNvPr>
@@ -5414,7 +5855,7 @@
           <p:nvPr>
             <p:extLst>
               <p:ext uri="{386F3935-93C4-4BCD-93E2-E3B085C9AB24}">
-                <p16:designElem xmlns:p16="http://schemas.microsoft.com/office/powerpoint/2015/main" val="1"/>
+                <p16:designElem xmlns:p16="http://schemas.microsoft.com/office/powerpoint/2015/main" xmlns="" val="1"/>
               </p:ext>
             </p:extLst>
           </p:nvPr>
@@ -5432,10 +5873,10 @@
             <p:cNvPr id="12" name="Freeform: Shape 11">
               <a:extLst>
                 <a:ext uri="{FF2B5EF4-FFF2-40B4-BE49-F238E27FC236}">
-                  <a16:creationId xmlns:a16="http://schemas.microsoft.com/office/drawing/2014/main" id="{937D94AD-9CD7-4F7F-B13A-399B37840660}"/>
+                  <a16:creationId xmlns:a16="http://schemas.microsoft.com/office/drawing/2014/main" xmlns="" id="{937D94AD-9CD7-4F7F-B13A-399B37840660}"/>
                 </a:ext>
                 <a:ext uri="{C183D7F6-B498-43B3-948B-1728B52AA6E4}">
-                  <adec:decorative xmlns:adec="http://schemas.microsoft.com/office/drawing/2017/decorative" val="1"/>
+                  <adec:decorative xmlns:adec="http://schemas.microsoft.com/office/drawing/2017/decorative" xmlns="" val="1"/>
                 </a:ext>
               </a:extLst>
             </p:cNvPr>
@@ -5443,7 +5884,7 @@
             <p:nvPr>
               <p:extLst>
                 <p:ext uri="{386F3935-93C4-4BCD-93E2-E3B085C9AB24}">
-                  <p16:designElem xmlns:p16="http://schemas.microsoft.com/office/powerpoint/2015/main" val="1"/>
+                  <p16:designElem xmlns:p16="http://schemas.microsoft.com/office/powerpoint/2015/main" xmlns="" val="1"/>
                 </p:ext>
               </p:extLst>
             </p:nvPr>
@@ -7403,10 +7844,10 @@
             <p:cNvPr id="8" name="Freeform: Shape 12">
               <a:extLst>
                 <a:ext uri="{FF2B5EF4-FFF2-40B4-BE49-F238E27FC236}">
-                  <a16:creationId xmlns:a16="http://schemas.microsoft.com/office/drawing/2014/main" id="{DF6D3FDC-6FDD-4615-B246-1FC651E95966}"/>
+                  <a16:creationId xmlns:a16="http://schemas.microsoft.com/office/drawing/2014/main" xmlns="" id="{DF6D3FDC-6FDD-4615-B246-1FC651E95966}"/>
                 </a:ext>
                 <a:ext uri="{C183D7F6-B498-43B3-948B-1728B52AA6E4}">
-                  <adec:decorative xmlns:adec="http://schemas.microsoft.com/office/drawing/2017/decorative" val="1"/>
+                  <adec:decorative xmlns:adec="http://schemas.microsoft.com/office/drawing/2017/decorative" xmlns="" val="1"/>
                 </a:ext>
               </a:extLst>
             </p:cNvPr>
@@ -7414,7 +7855,7 @@
             <p:nvPr>
               <p:extLst>
                 <p:ext uri="{386F3935-93C4-4BCD-93E2-E3B085C9AB24}">
-                  <p16:designElem xmlns:p16="http://schemas.microsoft.com/office/powerpoint/2015/main" val="1"/>
+                  <p16:designElem xmlns:p16="http://schemas.microsoft.com/office/powerpoint/2015/main" xmlns="" val="1"/>
                 </p:ext>
               </p:extLst>
             </p:nvPr>
@@ -9409,7 +9850,7 @@
           <p:cNvPr id="2" name="Tytuł 1">
             <a:extLst>
               <a:ext uri="{FF2B5EF4-FFF2-40B4-BE49-F238E27FC236}">
-                <a16:creationId xmlns:a16="http://schemas.microsoft.com/office/drawing/2014/main" id="{717E4EAB-AD00-95B5-F88C-2994713DE1A7}"/>
+                <a16:creationId xmlns:a16="http://schemas.microsoft.com/office/drawing/2014/main" xmlns="" id="{4399BC50-7929-BD0C-AC1F-1EE67FFC9A55}"/>
               </a:ext>
             </a:extLst>
           </p:cNvPr>
@@ -9422,58 +9863,273 @@
         </p:nvSpPr>
         <p:spPr>
           <a:xfrm>
-            <a:off x="762000" y="435864"/>
-            <a:ext cx="10750296" cy="1263649"/>
+            <a:off x="1080081" y="373598"/>
+            <a:ext cx="10389108" cy="1776984"/>
           </a:xfrm>
         </p:spPr>
         <p:txBody>
           <a:bodyPr>
-            <a:normAutofit fontScale="90000"/>
+            <a:normAutofit/>
           </a:bodyPr>
           <a:lstStyle/>
           <a:p>
             <a:r>
               <a:rPr lang="pl-PL" b="1" dirty="0"/>
-              <a:t>Oszacowanie liczby i typów potrzebnych stanowisk pracy użytkowników systemu</a:t>
+              <a:t>Propozycja technologii </a:t>
+            </a:r>
+            <a:r>
+              <a:rPr lang="pl-PL" b="1" dirty="0" smtClean="0"/>
+              <a:t>informatycznych</a:t>
             </a:r>
             <a:endParaRPr lang="pl-PL" dirty="0"/>
           </a:p>
         </p:txBody>
       </p:sp>
-      <p:pic>
-        <p:nvPicPr>
-          <p:cNvPr id="7" name="Obraz 6">
+      <p:sp>
+        <p:nvSpPr>
+          <p:cNvPr id="3" name="Symbol zastępczy zawartości 2">
             <a:extLst>
               <a:ext uri="{FF2B5EF4-FFF2-40B4-BE49-F238E27FC236}">
-                <a16:creationId xmlns:a16="http://schemas.microsoft.com/office/drawing/2014/main" id="{D1E12CA6-C5DC-C346-E604-ED1E7D302712}"/>
+                <a16:creationId xmlns:a16="http://schemas.microsoft.com/office/drawing/2014/main" xmlns="" id="{578A12E4-ACF8-47D2-089C-43881842EDAB}"/>
               </a:ext>
             </a:extLst>
           </p:cNvPr>
-          <p:cNvPicPr>
-            <a:picLocks noChangeAspect="1"/>
-          </p:cNvPicPr>
-          <p:nvPr/>
-        </p:nvPicPr>
-        <p:blipFill>
-          <a:blip r:embed="rId2"/>
-          <a:stretch>
-            <a:fillRect/>
-          </a:stretch>
-        </p:blipFill>
+          <p:cNvSpPr>
+            <a:spLocks noGrp="1"/>
+          </p:cNvSpPr>
+          <p:nvPr>
+            <p:ph idx="1"/>
+          </p:nvPr>
+        </p:nvSpPr>
         <p:spPr>
           <a:xfrm>
-            <a:off x="489949" y="2933602"/>
-            <a:ext cx="10871663" cy="2105123"/>
+            <a:off x="796834" y="3129425"/>
+            <a:ext cx="5037909" cy="1407741"/>
+          </a:xfrm>
+        </p:spPr>
+        <p:txBody>
+          <a:bodyPr>
+            <a:noAutofit/>
+          </a:bodyPr>
+          <a:lstStyle/>
+          <a:p>
+            <a:pPr marL="0" indent="0">
+              <a:buNone/>
+            </a:pPr>
+            <a:r>
+              <a:rPr lang="pl-PL" sz="1800" b="1" dirty="0" err="1" smtClean="0"/>
+              <a:t>Backend</a:t>
+            </a:r>
+            <a:r>
+              <a:rPr lang="pl-PL" sz="1800" b="1" dirty="0"/>
+              <a:t>: Java (Spring </a:t>
+            </a:r>
+            <a:r>
+              <a:rPr lang="pl-PL" sz="1800" b="1" dirty="0" err="1"/>
+              <a:t>Boot</a:t>
+            </a:r>
+            <a:r>
+              <a:rPr lang="pl-PL" sz="1800" b="1" dirty="0"/>
+              <a:t>) lub C# (.NET </a:t>
+            </a:r>
+            <a:r>
+              <a:rPr lang="pl-PL" sz="1800" b="1" dirty="0" err="1"/>
+              <a:t>Core</a:t>
+            </a:r>
+            <a:r>
+              <a:rPr lang="pl-PL" sz="1800" b="1" dirty="0"/>
+              <a:t>)</a:t>
+            </a:r>
+            <a:r>
+              <a:rPr lang="pl-PL" sz="1800" dirty="0"/>
+              <a:t>: </a:t>
+            </a:r>
+          </a:p>
+          <a:p>
+            <a:pPr marL="0" indent="0">
+              <a:buNone/>
+            </a:pPr>
+            <a:r>
+              <a:rPr lang="pl-PL" sz="1800" dirty="0" smtClean="0"/>
+              <a:t>stabilność </a:t>
+            </a:r>
+            <a:r>
+              <a:rPr lang="pl-PL" sz="1800" dirty="0"/>
+              <a:t>przetwarzania transakcji finansowych i łatwą integrację przez API.</a:t>
+            </a:r>
+            <a:br>
+              <a:rPr lang="pl-PL" sz="1800" dirty="0"/>
+            </a:br>
+            <a:endParaRPr lang="pl-PL" sz="1800" dirty="0"/>
+          </a:p>
+          <a:p>
+            <a:pPr marL="0" indent="0">
+              <a:buNone/>
+            </a:pPr>
+            <a:r>
+              <a:rPr lang="pl-PL" sz="1800" b="1" dirty="0" err="1"/>
+              <a:t>Frontend</a:t>
+            </a:r>
+            <a:r>
+              <a:rPr lang="pl-PL" sz="1800" dirty="0"/>
+              <a:t> </a:t>
+            </a:r>
+            <a:r>
+              <a:rPr lang="pl-PL" sz="1800" b="1" dirty="0"/>
+              <a:t>Panel Klienta / BOK: React.js lub </a:t>
+            </a:r>
+            <a:r>
+              <a:rPr lang="pl-PL" sz="1800" b="1" dirty="0" err="1"/>
+              <a:t>Angular</a:t>
+            </a:r>
+            <a:r>
+              <a:rPr lang="pl-PL" sz="1800" dirty="0"/>
+              <a:t>: </a:t>
+            </a:r>
+          </a:p>
+          <a:p>
+            <a:pPr marL="0" indent="0">
+              <a:buNone/>
+            </a:pPr>
+            <a:r>
+              <a:rPr lang="pl-PL" sz="1800" dirty="0"/>
+              <a:t>Komponentowe </a:t>
+            </a:r>
+            <a:r>
+              <a:rPr lang="pl-PL" sz="1800" dirty="0" err="1"/>
+              <a:t>frameworki</a:t>
+            </a:r>
+            <a:r>
+              <a:rPr lang="pl-PL" sz="1800" dirty="0"/>
+              <a:t> gwarantujące krótki czas odpowiedzi interfejsu.</a:t>
+            </a:r>
+          </a:p>
+          <a:p>
+            <a:pPr marL="0" indent="0">
+              <a:buNone/>
+            </a:pPr>
+            <a:endParaRPr lang="pl-PL" sz="1800" dirty="0"/>
+          </a:p>
+          <a:p>
+            <a:pPr marL="0" indent="0">
+              <a:buNone/>
+            </a:pPr>
+            <a:endParaRPr lang="pl-PL" sz="1800" dirty="0"/>
+          </a:p>
+        </p:txBody>
+      </p:sp>
+      <p:sp>
+        <p:nvSpPr>
+          <p:cNvPr id="4" name="pole tekstowe 3"/>
+          <p:cNvSpPr txBox="1"/>
+          <p:nvPr/>
+        </p:nvSpPr>
+        <p:spPr>
+          <a:xfrm>
+            <a:off x="11469189" y="6618514"/>
+            <a:ext cx="45719" cy="369332"/>
           </a:xfrm>
           <a:prstGeom prst="rect">
             <a:avLst/>
           </a:prstGeom>
+          <a:noFill/>
         </p:spPr>
-      </p:pic>
+        <p:txBody>
+          <a:bodyPr wrap="square" rtlCol="0">
+            <a:spAutoFit/>
+          </a:bodyPr>
+          <a:lstStyle/>
+          <a:p>
+            <a:endParaRPr lang="pl-PL" dirty="0"/>
+          </a:p>
+        </p:txBody>
+      </p:sp>
+      <p:sp>
+        <p:nvSpPr>
+          <p:cNvPr id="5" name="pole tekstowe 4"/>
+          <p:cNvSpPr txBox="1"/>
+          <p:nvPr/>
+        </p:nvSpPr>
+        <p:spPr>
+          <a:xfrm>
+            <a:off x="6949440" y="3129425"/>
+            <a:ext cx="3840480" cy="3139321"/>
+          </a:xfrm>
+          <a:prstGeom prst="rect">
+            <a:avLst/>
+          </a:prstGeom>
+          <a:noFill/>
+        </p:spPr>
+        <p:txBody>
+          <a:bodyPr wrap="square" rtlCol="0">
+            <a:spAutoFit/>
+          </a:bodyPr>
+          <a:lstStyle/>
+          <a:p>
+            <a:r>
+              <a:rPr lang="pl-PL" b="1" dirty="0"/>
+              <a:t>Aplikacja Mobilna: </a:t>
+            </a:r>
+            <a:r>
+              <a:rPr lang="pl-PL" b="1" dirty="0" err="1"/>
+              <a:t>React</a:t>
+            </a:r>
+            <a:r>
+              <a:rPr lang="pl-PL" b="1" dirty="0"/>
+              <a:t> native</a:t>
+            </a:r>
+            <a:r>
+              <a:rPr lang="pl-PL" dirty="0"/>
+              <a:t>:</a:t>
+            </a:r>
+          </a:p>
+          <a:p>
+            <a:r>
+              <a:rPr lang="pl-PL" dirty="0"/>
+              <a:t>Umożliwi jednoczesne wdrożenie na systemy Android oraz </a:t>
+            </a:r>
+            <a:r>
+              <a:rPr lang="pl-PL" dirty="0" err="1"/>
+              <a:t>iOS</a:t>
+            </a:r>
+            <a:r>
+              <a:rPr lang="pl-PL" dirty="0"/>
+              <a:t> z jednego kodu źródłowego.</a:t>
+            </a:r>
+            <a:br>
+              <a:rPr lang="pl-PL" dirty="0"/>
+            </a:br>
+            <a:endParaRPr lang="pl-PL" dirty="0"/>
+          </a:p>
+          <a:p>
+            <a:r>
+              <a:rPr lang="pl-PL" b="1" dirty="0"/>
+              <a:t>Baza danych: </a:t>
+            </a:r>
+            <a:r>
+              <a:rPr lang="pl-PL" b="1" dirty="0" err="1"/>
+              <a:t>PostgreSQL</a:t>
+            </a:r>
+            <a:r>
+              <a:rPr lang="pl-PL" dirty="0"/>
+              <a:t>:</a:t>
+            </a:r>
+          </a:p>
+          <a:p>
+            <a:r>
+              <a:rPr lang="pl-PL" dirty="0"/>
+              <a:t>relacyjna baza danych zapewniająca pełną spójność transakcyjną (ACID) niezbędną w module rozliczeń.</a:t>
+            </a:r>
+          </a:p>
+          <a:p>
+            <a:endParaRPr lang="pl-PL" dirty="0"/>
+          </a:p>
+        </p:txBody>
+      </p:sp>
     </p:spTree>
     <p:extLst>
       <p:ext uri="{BB962C8B-B14F-4D97-AF65-F5344CB8AC3E}">
-        <p14:creationId xmlns:p14="http://schemas.microsoft.com/office/powerpoint/2010/main" val="2458911987"/>
+        <p14:creationId xmlns:p14="http://schemas.microsoft.com/office/powerpoint/2010/main" val="1553585973"/>
       </p:ext>
     </p:extLst>
   </p:cSld>
@@ -9505,7 +10161,7 @@
           <p:cNvPr id="2" name="Tytuł 1">
             <a:extLst>
               <a:ext uri="{FF2B5EF4-FFF2-40B4-BE49-F238E27FC236}">
-                <a16:creationId xmlns:a16="http://schemas.microsoft.com/office/drawing/2014/main" id="{4399BC50-7929-BD0C-AC1F-1EE67FFC9A55}"/>
+                <a16:creationId xmlns:a16="http://schemas.microsoft.com/office/drawing/2014/main" xmlns="" id="{0F719BCF-3020-0064-5F83-B23F241D0D66}"/>
               </a:ext>
             </a:extLst>
           </p:cNvPr>
@@ -9518,19 +10174,17 @@
         </p:nvSpPr>
         <p:spPr>
           <a:xfrm>
-            <a:off x="903732" y="591312"/>
-            <a:ext cx="10389108" cy="1776984"/>
+            <a:off x="1524000" y="545592"/>
+            <a:ext cx="9144000" cy="1263649"/>
           </a:xfrm>
         </p:spPr>
         <p:txBody>
-          <a:bodyPr>
-            <a:normAutofit fontScale="90000"/>
-          </a:bodyPr>
+          <a:bodyPr/>
           <a:lstStyle/>
           <a:p>
             <a:r>
               <a:rPr lang="pl-PL" b="1" dirty="0"/>
-              <a:t>Propozycja technologii informatycznych, które mogą zostać wykorzystane do realizacji systemu.</a:t>
+              <a:t>Propozycja planu pracy</a:t>
             </a:r>
             <a:endParaRPr lang="pl-PL" dirty="0"/>
           </a:p>
@@ -9538,13 +10192,7 @@
       </p:sp>
       <p:sp>
         <p:nvSpPr>
-          <p:cNvPr id="3" name="Symbol zastępczy zawartości 2">
-            <a:extLst>
-              <a:ext uri="{FF2B5EF4-FFF2-40B4-BE49-F238E27FC236}">
-                <a16:creationId xmlns:a16="http://schemas.microsoft.com/office/drawing/2014/main" id="{578A12E4-ACF8-47D2-089C-43881842EDAB}"/>
-              </a:ext>
-            </a:extLst>
-          </p:cNvPr>
+          <p:cNvPr id="7" name="Symbol zastępczy zawartości 6"/>
           <p:cNvSpPr>
             <a:spLocks noGrp="1"/>
           </p:cNvSpPr>
@@ -9552,183 +10200,67 @@
             <p:ph idx="1"/>
           </p:nvPr>
         </p:nvSpPr>
-        <p:spPr>
-          <a:xfrm>
-            <a:off x="762000" y="2441448"/>
-            <a:ext cx="10668000" cy="4114799"/>
-          </a:xfrm>
-        </p:spPr>
+        <p:spPr/>
         <p:txBody>
-          <a:bodyPr>
-            <a:noAutofit/>
-          </a:bodyPr>
+          <a:bodyPr/>
           <a:lstStyle/>
           <a:p>
-            <a:r>
-              <a:rPr lang="pl-PL" sz="1100" b="1" dirty="0"/>
-              <a:t>Oprogramowanie</a:t>
-            </a:r>
-            <a:endParaRPr lang="pl-PL" sz="1100" dirty="0"/>
-          </a:p>
-          <a:p>
-            <a:r>
-              <a:rPr lang="pl-PL" sz="1100" b="1" dirty="0" err="1"/>
-              <a:t>Backend</a:t>
-            </a:r>
-            <a:r>
-              <a:rPr lang="pl-PL" sz="1100" b="1" dirty="0"/>
-              <a:t>: Java (Spring </a:t>
-            </a:r>
-            <a:r>
-              <a:rPr lang="pl-PL" sz="1100" b="1" dirty="0" err="1"/>
-              <a:t>Boot</a:t>
-            </a:r>
-            <a:r>
-              <a:rPr lang="pl-PL" sz="1100" b="1" dirty="0"/>
-              <a:t>) lub C# (.NET </a:t>
-            </a:r>
-            <a:r>
-              <a:rPr lang="pl-PL" sz="1100" b="1" dirty="0" err="1"/>
-              <a:t>Core</a:t>
-            </a:r>
-            <a:r>
-              <a:rPr lang="pl-PL" sz="1100" b="1" dirty="0"/>
-              <a:t>)</a:t>
-            </a:r>
-            <a:r>
-              <a:rPr lang="pl-PL" sz="1100" dirty="0"/>
-              <a:t>: </a:t>
-            </a:r>
-          </a:p>
-          <a:p>
-            <a:r>
-              <a:rPr lang="pl-PL" sz="1100" dirty="0"/>
-              <a:t>Zapewni stabilność przetwarzania transakcji finansowych i łatwą integrację przez API.</a:t>
-            </a:r>
-            <a:br>
-              <a:rPr lang="pl-PL" sz="1100" dirty="0"/>
-            </a:br>
-            <a:endParaRPr lang="pl-PL" sz="1100" dirty="0"/>
-          </a:p>
-          <a:p>
-            <a:r>
-              <a:rPr lang="pl-PL" sz="1100" b="1" dirty="0" err="1"/>
-              <a:t>Frontend</a:t>
-            </a:r>
-            <a:r>
-              <a:rPr lang="pl-PL" sz="1100" dirty="0"/>
-              <a:t> </a:t>
-            </a:r>
-            <a:r>
-              <a:rPr lang="pl-PL" sz="1100" b="1" dirty="0"/>
-              <a:t>Panel Klienta / BOK: React.js lub </a:t>
-            </a:r>
-            <a:r>
-              <a:rPr lang="pl-PL" sz="1100" b="1" dirty="0" err="1"/>
-              <a:t>Angular</a:t>
-            </a:r>
-            <a:r>
-              <a:rPr lang="pl-PL" sz="1100" dirty="0"/>
-              <a:t>: </a:t>
-            </a:r>
-          </a:p>
-          <a:p>
-            <a:r>
-              <a:rPr lang="pl-PL" sz="1100" dirty="0"/>
-              <a:t>Komponentowe </a:t>
-            </a:r>
-            <a:r>
-              <a:rPr lang="pl-PL" sz="1100" dirty="0" err="1"/>
-              <a:t>frameworki</a:t>
-            </a:r>
-            <a:r>
-              <a:rPr lang="pl-PL" sz="1100" dirty="0"/>
-              <a:t> gwarantujące krótki czas odpowiedzi interfejsu.</a:t>
-            </a:r>
-          </a:p>
-          <a:p>
-            <a:pPr marL="0" indent="0">
-              <a:buNone/>
-            </a:pPr>
-            <a:endParaRPr lang="pl-PL" sz="1100" dirty="0"/>
-          </a:p>
-          <a:p>
-            <a:r>
-              <a:rPr lang="pl-PL" sz="1100" b="1" dirty="0"/>
-              <a:t>Aplikacja Mobilna: </a:t>
-            </a:r>
-            <a:r>
-              <a:rPr lang="pl-PL" sz="1100" b="1" dirty="0" err="1"/>
-              <a:t>React</a:t>
-            </a:r>
-            <a:r>
-              <a:rPr lang="pl-PL" sz="1100" b="1" dirty="0"/>
-              <a:t> native</a:t>
-            </a:r>
-            <a:r>
-              <a:rPr lang="pl-PL" sz="1100" dirty="0"/>
-              <a:t>:</a:t>
-            </a:r>
-          </a:p>
-          <a:p>
-            <a:r>
-              <a:rPr lang="pl-PL" sz="1100" dirty="0"/>
-              <a:t>Umożliwi jednoczesne wdrożenie na systemy Android oraz iOS z jednego kodu źródłowego.</a:t>
-            </a:r>
-            <a:br>
-              <a:rPr lang="pl-PL" sz="1100" dirty="0"/>
-            </a:br>
-            <a:endParaRPr lang="pl-PL" sz="1100" dirty="0"/>
-          </a:p>
-          <a:p>
-            <a:r>
-              <a:rPr lang="pl-PL" sz="1100" b="1" dirty="0"/>
-              <a:t>Baza danych: </a:t>
-            </a:r>
-            <a:r>
-              <a:rPr lang="pl-PL" sz="1100" b="1" dirty="0" err="1"/>
-              <a:t>PostgreSQL</a:t>
-            </a:r>
-            <a:r>
-              <a:rPr lang="pl-PL" sz="1100" dirty="0"/>
-              <a:t>:</a:t>
-            </a:r>
-          </a:p>
-          <a:p>
-            <a:r>
-              <a:rPr lang="pl-PL" sz="1100" dirty="0"/>
-              <a:t>relacyjna baza danych zapewniająca pełną spójność transakcyjną (ACID) niezbędną w module rozliczeń.</a:t>
-            </a:r>
-          </a:p>
-          <a:p>
-            <a:pPr marL="0" indent="0">
-              <a:buNone/>
-            </a:pPr>
-            <a:endParaRPr lang="pl-PL" sz="1100" dirty="0"/>
-          </a:p>
-          <a:p>
-            <a:r>
-              <a:rPr lang="pl-PL" sz="1100" b="1" dirty="0"/>
-              <a:t>Sprzęt i infrastruktura:</a:t>
-            </a:r>
-            <a:endParaRPr lang="pl-PL" sz="1100" dirty="0"/>
-          </a:p>
-          <a:p>
-            <a:r>
-              <a:rPr lang="pl-PL" sz="1100" b="1" dirty="0"/>
-              <a:t>(opis przy diagramie wdrożenia)</a:t>
-            </a:r>
-            <a:br>
-              <a:rPr lang="pl-PL" sz="1100" dirty="0"/>
-            </a:br>
-            <a:endParaRPr lang="pl-PL" sz="1100" dirty="0"/>
+            <a:endParaRPr lang="pl-PL"/>
           </a:p>
         </p:txBody>
       </p:sp>
+      <p:pic>
+        <p:nvPicPr>
+          <p:cNvPr id="9" name="Obraz 8"/>
+          <p:cNvPicPr>
+            <a:picLocks noChangeAspect="1"/>
+          </p:cNvPicPr>
+          <p:nvPr/>
+        </p:nvPicPr>
+        <p:blipFill>
+          <a:blip r:embed="rId2"/>
+          <a:stretch>
+            <a:fillRect/>
+          </a:stretch>
+        </p:blipFill>
+        <p:spPr>
+          <a:xfrm>
+            <a:off x="977551" y="1581150"/>
+            <a:ext cx="9910092" cy="2100383"/>
+          </a:xfrm>
+          <a:prstGeom prst="rect">
+            <a:avLst/>
+          </a:prstGeom>
+        </p:spPr>
+      </p:pic>
+      <p:pic>
+        <p:nvPicPr>
+          <p:cNvPr id="10" name="Obraz 9"/>
+          <p:cNvPicPr>
+            <a:picLocks noChangeAspect="1"/>
+          </p:cNvPicPr>
+          <p:nvPr/>
+        </p:nvPicPr>
+        <p:blipFill>
+          <a:blip r:embed="rId3"/>
+          <a:stretch>
+            <a:fillRect/>
+          </a:stretch>
+        </p:blipFill>
+        <p:spPr>
+          <a:xfrm>
+            <a:off x="2657039" y="4148117"/>
+            <a:ext cx="6249272" cy="2000529"/>
+          </a:xfrm>
+          <a:prstGeom prst="rect">
+            <a:avLst/>
+          </a:prstGeom>
+        </p:spPr>
+      </p:pic>
     </p:spTree>
     <p:extLst>
       <p:ext uri="{BB962C8B-B14F-4D97-AF65-F5344CB8AC3E}">
-        <p14:creationId xmlns:p14="http://schemas.microsoft.com/office/powerpoint/2010/main" val="1553585973"/>
+        <p14:creationId xmlns:p14="http://schemas.microsoft.com/office/powerpoint/2010/main" val="2797758957"/>
       </p:ext>
     </p:extLst>
   </p:cSld>
@@ -9760,184 +10292,7 @@
           <p:cNvPr id="2" name="Tytuł 1">
             <a:extLst>
               <a:ext uri="{FF2B5EF4-FFF2-40B4-BE49-F238E27FC236}">
-                <a16:creationId xmlns:a16="http://schemas.microsoft.com/office/drawing/2014/main" id="{0F719BCF-3020-0064-5F83-B23F241D0D66}"/>
-              </a:ext>
-            </a:extLst>
-          </p:cNvPr>
-          <p:cNvSpPr>
-            <a:spLocks noGrp="1"/>
-          </p:cNvSpPr>
-          <p:nvPr>
-            <p:ph type="title"/>
-          </p:nvPr>
-        </p:nvSpPr>
-        <p:spPr>
-          <a:xfrm>
-            <a:off x="1524000" y="545592"/>
-            <a:ext cx="9144000" cy="1263649"/>
-          </a:xfrm>
-        </p:spPr>
-        <p:txBody>
-          <a:bodyPr/>
-          <a:lstStyle/>
-          <a:p>
-            <a:r>
-              <a:rPr lang="pl-PL" b="1" dirty="0"/>
-              <a:t>Propozycja planu pracy</a:t>
-            </a:r>
-            <a:endParaRPr lang="pl-PL" dirty="0"/>
-          </a:p>
-        </p:txBody>
-      </p:sp>
-      <p:sp>
-        <p:nvSpPr>
-          <p:cNvPr id="3" name="Symbol zastępczy zawartości 2">
-            <a:extLst>
-              <a:ext uri="{FF2B5EF4-FFF2-40B4-BE49-F238E27FC236}">
-                <a16:creationId xmlns:a16="http://schemas.microsoft.com/office/drawing/2014/main" id="{1437F819-C3FC-CABB-C92A-8970220803EC}"/>
-              </a:ext>
-            </a:extLst>
-          </p:cNvPr>
-          <p:cNvSpPr>
-            <a:spLocks noGrp="1"/>
-          </p:cNvSpPr>
-          <p:nvPr>
-            <p:ph idx="1"/>
-          </p:nvPr>
-        </p:nvSpPr>
-        <p:spPr>
-          <a:xfrm>
-            <a:off x="762000" y="1947673"/>
-            <a:ext cx="10668000" cy="4148328"/>
-          </a:xfrm>
-        </p:spPr>
-        <p:txBody>
-          <a:bodyPr>
-            <a:normAutofit fontScale="62500" lnSpcReduction="20000"/>
-          </a:bodyPr>
-          <a:lstStyle/>
-          <a:p>
-            <a:r>
-              <a:rPr lang="pl-PL" b="1" dirty="0"/>
-              <a:t>Etapy:</a:t>
-            </a:r>
-            <a:endParaRPr lang="pl-PL" dirty="0"/>
-          </a:p>
-          <a:p>
-            <a:r>
-              <a:rPr lang="pl-PL" dirty="0"/>
-              <a:t>Etap 1: Analiza i architektura bazy danych (10 dni)</a:t>
-            </a:r>
-          </a:p>
-          <a:p>
-            <a:r>
-              <a:rPr lang="pl-PL" dirty="0"/>
-              <a:t>Etap 2: </a:t>
-            </a:r>
-            <a:r>
-              <a:rPr lang="pl-PL" dirty="0" err="1"/>
-              <a:t>Backend</a:t>
-            </a:r>
-            <a:r>
-              <a:rPr lang="pl-PL" dirty="0"/>
-              <a:t> i CRM (25 dni)</a:t>
-            </a:r>
-          </a:p>
-          <a:p>
-            <a:r>
-              <a:rPr lang="pl-PL" dirty="0"/>
-              <a:t>Etap 3: Moduł sieciowy (15 dni)</a:t>
-            </a:r>
-          </a:p>
-          <a:p>
-            <a:r>
-              <a:rPr lang="pl-PL" dirty="0"/>
-              <a:t>Etap 4: Panel BOK (10 dni)</a:t>
-            </a:r>
-          </a:p>
-          <a:p>
-            <a:r>
-              <a:rPr lang="pl-PL" dirty="0"/>
-              <a:t>Etap 5: Panel samoobsługowy klienta (10 dni)</a:t>
-            </a:r>
-          </a:p>
-          <a:p>
-            <a:r>
-              <a:rPr lang="pl-PL" dirty="0"/>
-              <a:t>Etap 6: Integracja i testowanie (25 dni)</a:t>
-            </a:r>
-          </a:p>
-          <a:p>
-            <a:br>
-              <a:rPr lang="pl-PL" dirty="0"/>
-            </a:br>
-            <a:endParaRPr lang="pl-PL" dirty="0"/>
-          </a:p>
-          <a:p>
-            <a:r>
-              <a:rPr lang="pl-PL" b="1" dirty="0"/>
-              <a:t>Zależności między etapami oraz alokacja zasobów ludzkich:</a:t>
-            </a:r>
-            <a:endParaRPr lang="pl-PL" dirty="0"/>
-          </a:p>
-          <a:p>
-            <a:r>
-              <a:rPr lang="pl-PL" dirty="0"/>
-              <a:t>W uproszczeniu ze względu na potrzeby projektu, można uznać że mamy do dyspozycji 50 programistów </a:t>
-            </a:r>
-            <a:r>
-              <a:rPr lang="pl-PL" dirty="0" err="1"/>
-              <a:t>full-stack</a:t>
-            </a:r>
-            <a:r>
-              <a:rPr lang="pl-PL" dirty="0"/>
-              <a:t>.</a:t>
-            </a:r>
-          </a:p>
-          <a:p>
-            <a:br>
-              <a:rPr lang="pl-PL" dirty="0"/>
-            </a:br>
-            <a:endParaRPr lang="pl-PL" dirty="0"/>
-          </a:p>
-        </p:txBody>
-      </p:sp>
-    </p:spTree>
-    <p:extLst>
-      <p:ext uri="{BB962C8B-B14F-4D97-AF65-F5344CB8AC3E}">
-        <p14:creationId xmlns:p14="http://schemas.microsoft.com/office/powerpoint/2010/main" val="2797758957"/>
-      </p:ext>
-    </p:extLst>
-  </p:cSld>
-  <p:clrMapOvr>
-    <a:masterClrMapping/>
-  </p:clrMapOvr>
-</p:sld>
-</file>
-
-<file path=ppt/slides/slide13.xml><?xml version="1.0" encoding="utf-8"?>
-<p:sld xmlns:a="http://schemas.openxmlformats.org/drawingml/2006/main" xmlns:r="http://schemas.openxmlformats.org/officeDocument/2006/relationships" xmlns:p="http://schemas.openxmlformats.org/presentationml/2006/main">
-  <p:cSld>
-    <p:spTree>
-      <p:nvGrpSpPr>
-        <p:cNvPr id="1" name=""/>
-        <p:cNvGrpSpPr/>
-        <p:nvPr/>
-      </p:nvGrpSpPr>
-      <p:grpSpPr>
-        <a:xfrm>
-          <a:off x="0" y="0"/>
-          <a:ext cx="0" cy="0"/>
-          <a:chOff x="0" y="0"/>
-          <a:chExt cx="0" cy="0"/>
-        </a:xfrm>
-      </p:grpSpPr>
-      <p:sp>
-        <p:nvSpPr>
-          <p:cNvPr id="2" name="Tytuł 1">
-            <a:extLst>
-              <a:ext uri="{FF2B5EF4-FFF2-40B4-BE49-F238E27FC236}">
-                <a16:creationId xmlns:a16="http://schemas.microsoft.com/office/drawing/2014/main" id="{42BF7689-5756-7360-478D-84A39A191698}"/>
+                <a16:creationId xmlns:a16="http://schemas.microsoft.com/office/drawing/2014/main" xmlns="" id="{42BF7689-5756-7360-478D-84A39A191698}"/>
               </a:ext>
             </a:extLst>
           </p:cNvPr>
@@ -9973,7 +10328,7 @@
           <p:cNvPr id="8" name="Obraz 7">
             <a:extLst>
               <a:ext uri="{FF2B5EF4-FFF2-40B4-BE49-F238E27FC236}">
-                <a16:creationId xmlns:a16="http://schemas.microsoft.com/office/drawing/2014/main" id="{13910E7B-07F7-99F8-4C8D-08C00661E57C}"/>
+                <a16:creationId xmlns:a16="http://schemas.microsoft.com/office/drawing/2014/main" xmlns="" id="{13910E7B-07F7-99F8-4C8D-08C00661E57C}"/>
               </a:ext>
             </a:extLst>
           </p:cNvPr>
@@ -10011,7 +10366,7 @@
 </p:sld>
 </file>
 
-<file path=ppt/slides/slide14.xml><?xml version="1.0" encoding="utf-8"?>
+<file path=ppt/slides/slide13.xml><?xml version="1.0" encoding="utf-8"?>
 <p:sld xmlns:a="http://schemas.openxmlformats.org/drawingml/2006/main" xmlns:r="http://schemas.openxmlformats.org/officeDocument/2006/relationships" xmlns:p="http://schemas.openxmlformats.org/presentationml/2006/main">
   <p:cSld>
     <p:spTree>
@@ -10033,7 +10388,7 @@
           <p:cNvPr id="2" name="Tytuł 1">
             <a:extLst>
               <a:ext uri="{FF2B5EF4-FFF2-40B4-BE49-F238E27FC236}">
-                <a16:creationId xmlns:a16="http://schemas.microsoft.com/office/drawing/2014/main" id="{530078C5-9A74-5C68-7206-7D44432F8F81}"/>
+                <a16:creationId xmlns:a16="http://schemas.microsoft.com/office/drawing/2014/main" xmlns="" id="{530078C5-9A74-5C68-7206-7D44432F8F81}"/>
               </a:ext>
             </a:extLst>
           </p:cNvPr>
@@ -10066,13 +10421,7 @@
       </p:sp>
       <p:sp>
         <p:nvSpPr>
-          <p:cNvPr id="3" name="Symbol zastępczy zawartości 2">
-            <a:extLst>
-              <a:ext uri="{FF2B5EF4-FFF2-40B4-BE49-F238E27FC236}">
-                <a16:creationId xmlns:a16="http://schemas.microsoft.com/office/drawing/2014/main" id="{DB777D8C-4F74-8DAA-98D2-DD3BA831186B}"/>
-              </a:ext>
-            </a:extLst>
-          </p:cNvPr>
+          <p:cNvPr id="6" name="Symbol zastępczy zawartości 5"/>
           <p:cNvSpPr>
             <a:spLocks noGrp="1"/>
           </p:cNvSpPr>
@@ -10080,74 +10429,63 @@
             <p:ph idx="1"/>
           </p:nvPr>
         </p:nvSpPr>
-        <p:spPr>
-          <a:xfrm>
-            <a:off x="762000" y="1435608"/>
-            <a:ext cx="10668000" cy="4995671"/>
-          </a:xfrm>
-        </p:spPr>
+        <p:spPr/>
         <p:txBody>
           <a:bodyPr/>
           <a:lstStyle/>
           <a:p>
-            <a:r>
-              <a:rPr lang="pl-PL" sz="2400" dirty="0"/>
-              <a:t>Oprogramowanie -&gt; Moduł Centralny (80000 PLN)</a:t>
-            </a:r>
-          </a:p>
-          <a:p>
-            <a:r>
-              <a:rPr lang="pl-PL" sz="2400" dirty="0"/>
-              <a:t>Oprogramowanie -&gt; Panel Pracownika BOK (40000 PLN)</a:t>
-            </a:r>
-          </a:p>
-          <a:p>
-            <a:r>
-              <a:rPr lang="pl-PL" sz="2400" dirty="0"/>
-              <a:t>Oprogramowanie -&gt; Panel Samoobsługowy (30000 PLN)</a:t>
-            </a:r>
-          </a:p>
-          <a:p>
-            <a:r>
-              <a:rPr lang="pl-PL" sz="2400" dirty="0"/>
-              <a:t>Oprogramowanie -&gt; Aplikacja Mobilna (60000 PLN)</a:t>
-            </a:r>
-          </a:p>
-          <a:p>
-            <a:r>
-              <a:rPr lang="pl-PL" sz="2400" dirty="0"/>
-              <a:t>Oprogramowanie -&gt; Moduł Sieciowy i Integracja API (45000 PLN)</a:t>
-            </a:r>
-          </a:p>
-          <a:p>
-            <a:r>
-              <a:rPr lang="pl-PL" sz="2400" dirty="0"/>
-              <a:t>System i Infrastruktura (Konfiguracja serwerów aplikacji, migracji bazy danych, itp..) (30000 PLN)</a:t>
-            </a:r>
-          </a:p>
-          <a:p>
-            <a:r>
-              <a:rPr lang="pl-PL" sz="2400" dirty="0"/>
-              <a:t>Szkolenia (20000 PLN)</a:t>
-            </a:r>
-          </a:p>
-          <a:p>
-            <a:r>
-              <a:rPr lang="pl-PL" sz="2400" dirty="0"/>
-              <a:t>Konsultacje i Wdrożenie (20000 PLN)</a:t>
-            </a:r>
-          </a:p>
-          <a:p>
-            <a:r>
-              <a:rPr lang="pl-PL" sz="2400" dirty="0"/>
-              <a:t>SUMA: 325000 PLN</a:t>
-            </a:r>
-          </a:p>
-          <a:p>
-            <a:endParaRPr lang="pl-PL" dirty="0"/>
+            <a:endParaRPr lang="pl-PL"/>
           </a:p>
         </p:txBody>
       </p:sp>
+      <p:pic>
+        <p:nvPicPr>
+          <p:cNvPr id="7" name="Obraz 6"/>
+          <p:cNvPicPr>
+            <a:picLocks noChangeAspect="1"/>
+          </p:cNvPicPr>
+          <p:nvPr/>
+        </p:nvPicPr>
+        <p:blipFill>
+          <a:blip r:embed="rId3"/>
+          <a:stretch>
+            <a:fillRect/>
+          </a:stretch>
+        </p:blipFill>
+        <p:spPr>
+          <a:xfrm>
+            <a:off x="109096" y="1690369"/>
+            <a:ext cx="5482080" cy="4377420"/>
+          </a:xfrm>
+          <a:prstGeom prst="rect">
+            <a:avLst/>
+          </a:prstGeom>
+        </p:spPr>
+      </p:pic>
+      <p:pic>
+        <p:nvPicPr>
+          <p:cNvPr id="8" name="Obraz 7"/>
+          <p:cNvPicPr>
+            <a:picLocks noChangeAspect="1"/>
+          </p:cNvPicPr>
+          <p:nvPr/>
+        </p:nvPicPr>
+        <p:blipFill>
+          <a:blip r:embed="rId4"/>
+          <a:stretch>
+            <a:fillRect/>
+          </a:stretch>
+        </p:blipFill>
+        <p:spPr>
+          <a:xfrm>
+            <a:off x="5776474" y="2495325"/>
+            <a:ext cx="6306430" cy="3200847"/>
+          </a:xfrm>
+          <a:prstGeom prst="rect">
+            <a:avLst/>
+          </a:prstGeom>
+        </p:spPr>
+      </p:pic>
     </p:spTree>
     <p:extLst>
       <p:ext uri="{BB962C8B-B14F-4D97-AF65-F5344CB8AC3E}">
@@ -10161,7 +10499,7 @@
 </p:sld>
 </file>
 
-<file path=ppt/slides/slide15.xml><?xml version="1.0" encoding="utf-8"?>
+<file path=ppt/slides/slide14.xml><?xml version="1.0" encoding="utf-8"?>
 <p:sld xmlns:a="http://schemas.openxmlformats.org/drawingml/2006/main" xmlns:r="http://schemas.openxmlformats.org/officeDocument/2006/relationships" xmlns:p="http://schemas.openxmlformats.org/presentationml/2006/main">
   <p:cSld>
     <p:bg>
@@ -10191,10 +10529,10 @@
           <p:cNvPr id="9" name="Rectangle 8">
             <a:extLst>
               <a:ext uri="{FF2B5EF4-FFF2-40B4-BE49-F238E27FC236}">
-                <a16:creationId xmlns:a16="http://schemas.microsoft.com/office/drawing/2014/main" id="{9B37791B-B040-4694-BFDC-8DD132D86E8E}"/>
+                <a16:creationId xmlns:a16="http://schemas.microsoft.com/office/drawing/2014/main" xmlns="" id="{9B37791B-B040-4694-BFDC-8DD132D86E8E}"/>
               </a:ext>
               <a:ext uri="{C183D7F6-B498-43B3-948B-1728B52AA6E4}">
-                <adec:decorative xmlns:adec="http://schemas.microsoft.com/office/drawing/2017/decorative" val="1"/>
+                <adec:decorative xmlns:adec="http://schemas.microsoft.com/office/drawing/2017/decorative" xmlns="" val="1"/>
               </a:ext>
             </a:extLst>
           </p:cNvPr>
@@ -10204,7 +10542,7 @@
           <p:nvPr>
             <p:extLst>
               <p:ext uri="{386F3935-93C4-4BCD-93E2-E3B085C9AB24}">
-                <p16:designElem xmlns:p16="http://schemas.microsoft.com/office/powerpoint/2015/main" val="1"/>
+                <p16:designElem xmlns:p16="http://schemas.microsoft.com/office/powerpoint/2015/main" xmlns="" val="1"/>
               </p:ext>
             </p:extLst>
           </p:nvPr>
@@ -10254,7 +10592,7 @@
           <p:cNvPr id="6" name="Graphic 5" descr="Smiling Face with No Fill">
             <a:extLst>
               <a:ext uri="{FF2B5EF4-FFF2-40B4-BE49-F238E27FC236}">
-                <a16:creationId xmlns:a16="http://schemas.microsoft.com/office/drawing/2014/main" id="{43E17CD0-0F55-2752-0A89-4A290F0D2E4B}"/>
+                <a16:creationId xmlns:a16="http://schemas.microsoft.com/office/drawing/2014/main" xmlns="" id="{43E17CD0-0F55-2752-0A89-4A290F0D2E4B}"/>
               </a:ext>
             </a:extLst>
           </p:cNvPr>
@@ -10270,7 +10608,7 @@
                 <a14:useLocalDpi xmlns:a14="http://schemas.microsoft.com/office/drawing/2010/main" val="0"/>
               </a:ext>
               <a:ext uri="{96DAC541-7B7A-43D3-8B79-37D633B846F1}">
-                <asvg:svgBlip xmlns:asvg="http://schemas.microsoft.com/office/drawing/2016/SVG/main" r:embed="rId2"/>
+                <asvg:svgBlip xmlns:asvg="http://schemas.microsoft.com/office/drawing/2016/SVG/main" xmlns="" r:embed="rId2"/>
               </a:ext>
             </a:extLst>
           </a:blip>
@@ -10293,10 +10631,10 @@
           <p:cNvPr id="11" name="Group 10">
             <a:extLst>
               <a:ext uri="{FF2B5EF4-FFF2-40B4-BE49-F238E27FC236}">
-                <a16:creationId xmlns:a16="http://schemas.microsoft.com/office/drawing/2014/main" id="{4252769E-B9F0-4068-A645-5BBEF16E9C28}"/>
+                <a16:creationId xmlns:a16="http://schemas.microsoft.com/office/drawing/2014/main" xmlns="" id="{4252769E-B9F0-4068-A645-5BBEF16E9C28}"/>
               </a:ext>
               <a:ext uri="{C183D7F6-B498-43B3-948B-1728B52AA6E4}">
-                <adec:decorative xmlns:adec="http://schemas.microsoft.com/office/drawing/2017/decorative" val="1"/>
+                <adec:decorative xmlns:adec="http://schemas.microsoft.com/office/drawing/2017/decorative" xmlns="" val="1"/>
               </a:ext>
             </a:extLst>
           </p:cNvPr>
@@ -10306,7 +10644,7 @@
           <p:nvPr>
             <p:extLst>
               <p:ext uri="{386F3935-93C4-4BCD-93E2-E3B085C9AB24}">
-                <p16:designElem xmlns:p16="http://schemas.microsoft.com/office/powerpoint/2015/main" val="1"/>
+                <p16:designElem xmlns:p16="http://schemas.microsoft.com/office/powerpoint/2015/main" xmlns="" val="1"/>
               </p:ext>
             </p:extLst>
           </p:nvPr>
@@ -10324,10 +10662,10 @@
             <p:cNvPr id="12" name="Freeform: Shape 11">
               <a:extLst>
                 <a:ext uri="{FF2B5EF4-FFF2-40B4-BE49-F238E27FC236}">
-                  <a16:creationId xmlns:a16="http://schemas.microsoft.com/office/drawing/2014/main" id="{1E12D6AD-7096-45BB-9C02-468B2704C158}"/>
+                  <a16:creationId xmlns:a16="http://schemas.microsoft.com/office/drawing/2014/main" xmlns="" id="{1E12D6AD-7096-45BB-9C02-468B2704C158}"/>
                 </a:ext>
                 <a:ext uri="{C183D7F6-B498-43B3-948B-1728B52AA6E4}">
-                  <adec:decorative xmlns:adec="http://schemas.microsoft.com/office/drawing/2017/decorative" val="1"/>
+                  <adec:decorative xmlns:adec="http://schemas.microsoft.com/office/drawing/2017/decorative" xmlns="" val="1"/>
                 </a:ext>
               </a:extLst>
             </p:cNvPr>
@@ -10335,7 +10673,7 @@
             <p:nvPr>
               <p:extLst>
                 <p:ext uri="{386F3935-93C4-4BCD-93E2-E3B085C9AB24}">
-                  <p16:designElem xmlns:p16="http://schemas.microsoft.com/office/powerpoint/2015/main" val="1"/>
+                  <p16:designElem xmlns:p16="http://schemas.microsoft.com/office/powerpoint/2015/main" xmlns="" val="1"/>
                 </p:ext>
               </p:extLst>
             </p:nvPr>
@@ -13757,10 +14095,10 @@
             <p:cNvPr id="13" name="Freeform: Shape 12">
               <a:extLst>
                 <a:ext uri="{FF2B5EF4-FFF2-40B4-BE49-F238E27FC236}">
-                  <a16:creationId xmlns:a16="http://schemas.microsoft.com/office/drawing/2014/main" id="{39953252-97DE-4766-B2F6-E4FDA2FDA6A5}"/>
+                  <a16:creationId xmlns:a16="http://schemas.microsoft.com/office/drawing/2014/main" xmlns="" id="{39953252-97DE-4766-B2F6-E4FDA2FDA6A5}"/>
                 </a:ext>
                 <a:ext uri="{C183D7F6-B498-43B3-948B-1728B52AA6E4}">
-                  <adec:decorative xmlns:adec="http://schemas.microsoft.com/office/drawing/2017/decorative" val="1"/>
+                  <adec:decorative xmlns:adec="http://schemas.microsoft.com/office/drawing/2017/decorative" xmlns="" val="1"/>
                 </a:ext>
               </a:extLst>
             </p:cNvPr>
@@ -13768,7 +14106,7 @@
             <p:nvPr>
               <p:extLst>
                 <p:ext uri="{386F3935-93C4-4BCD-93E2-E3B085C9AB24}">
-                  <p16:designElem xmlns:p16="http://schemas.microsoft.com/office/powerpoint/2015/main" val="1"/>
+                  <p16:designElem xmlns:p16="http://schemas.microsoft.com/office/powerpoint/2015/main" xmlns="" val="1"/>
                 </p:ext>
               </p:extLst>
             </p:nvPr>
@@ -17195,7 +17533,7 @@
           <p:cNvPr id="2" name="Tytuł 1">
             <a:extLst>
               <a:ext uri="{FF2B5EF4-FFF2-40B4-BE49-F238E27FC236}">
-                <a16:creationId xmlns:a16="http://schemas.microsoft.com/office/drawing/2014/main" id="{017F76E7-F6D0-67C1-6860-CF6138804D5F}"/>
+                <a16:creationId xmlns:a16="http://schemas.microsoft.com/office/drawing/2014/main" xmlns="" id="{017F76E7-F6D0-67C1-6860-CF6138804D5F}"/>
               </a:ext>
             </a:extLst>
           </p:cNvPr>
@@ -17260,7 +17598,7 @@
           <p:cNvPr id="2" name="Tytuł 1">
             <a:extLst>
               <a:ext uri="{FF2B5EF4-FFF2-40B4-BE49-F238E27FC236}">
-                <a16:creationId xmlns:a16="http://schemas.microsoft.com/office/drawing/2014/main" id="{EADFB341-40B2-3A5A-F07D-AE5E08CDF6FA}"/>
+                <a16:creationId xmlns:a16="http://schemas.microsoft.com/office/drawing/2014/main" xmlns="" id="{EADFB341-40B2-3A5A-F07D-AE5E08CDF6FA}"/>
               </a:ext>
             </a:extLst>
           </p:cNvPr>
@@ -17293,7 +17631,7 @@
           <p:cNvPr id="3" name="Symbol zastępczy zawartości 2">
             <a:extLst>
               <a:ext uri="{FF2B5EF4-FFF2-40B4-BE49-F238E27FC236}">
-                <a16:creationId xmlns:a16="http://schemas.microsoft.com/office/drawing/2014/main" id="{0CE83CC0-DEFB-C597-73F3-87DF1DE872DC}"/>
+                <a16:creationId xmlns:a16="http://schemas.microsoft.com/office/drawing/2014/main" xmlns="" id="{0CE83CC0-DEFB-C597-73F3-87DF1DE872DC}"/>
               </a:ext>
             </a:extLst>
           </p:cNvPr>
@@ -17312,7 +17650,7 @@
         </p:spPr>
         <p:txBody>
           <a:bodyPr>
-            <a:normAutofit fontScale="92500" lnSpcReduction="10000"/>
+            <a:normAutofit fontScale="92500"/>
           </a:bodyPr>
           <a:lstStyle/>
           <a:p>
@@ -17337,7 +17675,7 @@
           <p:cNvPr id="7" name="pole tekstowe 6">
             <a:extLst>
               <a:ext uri="{FF2B5EF4-FFF2-40B4-BE49-F238E27FC236}">
-                <a16:creationId xmlns:a16="http://schemas.microsoft.com/office/drawing/2014/main" id="{9AC7C93B-90B7-5A3C-CAF8-0010F727DCCB}"/>
+                <a16:creationId xmlns:a16="http://schemas.microsoft.com/office/drawing/2014/main" xmlns="" id="{9AC7C93B-90B7-5A3C-CAF8-0010F727DCCB}"/>
               </a:ext>
             </a:extLst>
           </p:cNvPr>
@@ -17373,7 +17711,7 @@
           <p:cNvPr id="8" name="pole tekstowe 7">
             <a:extLst>
               <a:ext uri="{FF2B5EF4-FFF2-40B4-BE49-F238E27FC236}">
-                <a16:creationId xmlns:a16="http://schemas.microsoft.com/office/drawing/2014/main" id="{9435ED82-66F3-3A5D-D6DE-A2DAAD236269}"/>
+                <a16:creationId xmlns:a16="http://schemas.microsoft.com/office/drawing/2014/main" xmlns="" id="{9435ED82-66F3-3A5D-D6DE-A2DAAD236269}"/>
               </a:ext>
             </a:extLst>
           </p:cNvPr>
@@ -17405,6 +17743,10 @@
             </a:endParaRPr>
           </a:p>
           <a:p>
+            <a:r>
+              <a:rPr lang="pl-PL" dirty="0"/>
+              <a:t/>
+            </a:r>
             <a:br>
               <a:rPr lang="pl-PL" dirty="0"/>
             </a:br>
@@ -17447,123 +17789,7 @@
           <p:cNvPr id="2" name="Tytuł 1">
             <a:extLst>
               <a:ext uri="{FF2B5EF4-FFF2-40B4-BE49-F238E27FC236}">
-                <a16:creationId xmlns:a16="http://schemas.microsoft.com/office/drawing/2014/main" id="{521E70E4-35E8-8DC0-88C8-AC976CA76F80}"/>
-              </a:ext>
-            </a:extLst>
-          </p:cNvPr>
-          <p:cNvSpPr>
-            <a:spLocks noGrp="1"/>
-          </p:cNvSpPr>
-          <p:nvPr>
-            <p:ph type="title"/>
-          </p:nvPr>
-        </p:nvSpPr>
-        <p:spPr>
-          <a:xfrm>
-            <a:off x="2448306" y="352044"/>
-            <a:ext cx="9144000" cy="1263649"/>
-          </a:xfrm>
-        </p:spPr>
-        <p:txBody>
-          <a:bodyPr>
-            <a:normAutofit fontScale="90000"/>
-          </a:bodyPr>
-          <a:lstStyle/>
-          <a:p>
-            <a:r>
-              <a:rPr lang="pl-PL" dirty="0"/>
-              <a:t>Diagram przypadków użycia:</a:t>
-            </a:r>
-            <a:br>
-              <a:rPr lang="pl-PL" b="1" dirty="0"/>
-            </a:br>
-            <a:endParaRPr lang="pl-PL" dirty="0"/>
-          </a:p>
-        </p:txBody>
-      </p:sp>
-      <p:pic>
-        <p:nvPicPr>
-          <p:cNvPr id="1026" name="Picture 2">
-            <a:extLst>
-              <a:ext uri="{FF2B5EF4-FFF2-40B4-BE49-F238E27FC236}">
-                <a16:creationId xmlns:a16="http://schemas.microsoft.com/office/drawing/2014/main" id="{2B52FF48-1472-A84E-37AE-F0C7B2EB4C03}"/>
-              </a:ext>
-            </a:extLst>
-          </p:cNvPr>
-          <p:cNvPicPr>
-            <a:picLocks noChangeAspect="1" noChangeArrowheads="1"/>
-          </p:cNvPicPr>
-          <p:nvPr/>
-        </p:nvPicPr>
-        <p:blipFill>
-          <a:blip r:embed="rId2">
-            <a:extLst>
-              <a:ext uri="{28A0092B-C50C-407E-A947-70E740481C1C}">
-                <a14:useLocalDpi xmlns:a14="http://schemas.microsoft.com/office/drawing/2010/main" val="0"/>
-              </a:ext>
-            </a:extLst>
-          </a:blip>
-          <a:srcRect/>
-          <a:stretch>
-            <a:fillRect/>
-          </a:stretch>
-        </p:blipFill>
-        <p:spPr bwMode="auto">
-          <a:xfrm>
-            <a:off x="3128391" y="1118807"/>
-            <a:ext cx="5734050" cy="5553075"/>
-          </a:xfrm>
-          <a:prstGeom prst="rect">
-            <a:avLst/>
-          </a:prstGeom>
-          <a:noFill/>
-          <a:extLst>
-            <a:ext uri="{909E8E84-426E-40DD-AFC4-6F175D3DCCD1}">
-              <a14:hiddenFill xmlns:a14="http://schemas.microsoft.com/office/drawing/2010/main">
-                <a:solidFill>
-                  <a:srgbClr val="FFFFFF"/>
-                </a:solidFill>
-              </a14:hiddenFill>
-            </a:ext>
-          </a:extLst>
-        </p:spPr>
-      </p:pic>
-    </p:spTree>
-    <p:extLst>
-      <p:ext uri="{BB962C8B-B14F-4D97-AF65-F5344CB8AC3E}">
-        <p14:creationId xmlns:p14="http://schemas.microsoft.com/office/powerpoint/2010/main" val="2374111933"/>
-      </p:ext>
-    </p:extLst>
-  </p:cSld>
-  <p:clrMapOvr>
-    <a:masterClrMapping/>
-  </p:clrMapOvr>
-</p:sld>
-</file>
-
-<file path=ppt/slides/slide4.xml><?xml version="1.0" encoding="utf-8"?>
-<p:sld xmlns:a="http://schemas.openxmlformats.org/drawingml/2006/main" xmlns:r="http://schemas.openxmlformats.org/officeDocument/2006/relationships" xmlns:p="http://schemas.openxmlformats.org/presentationml/2006/main">
-  <p:cSld>
-    <p:spTree>
-      <p:nvGrpSpPr>
-        <p:cNvPr id="1" name=""/>
-        <p:cNvGrpSpPr/>
-        <p:nvPr/>
-      </p:nvGrpSpPr>
-      <p:grpSpPr>
-        <a:xfrm>
-          <a:off x="0" y="0"/>
-          <a:ext cx="0" cy="0"/>
-          <a:chOff x="0" y="0"/>
-          <a:chExt cx="0" cy="0"/>
-        </a:xfrm>
-      </p:grpSpPr>
-      <p:sp>
-        <p:nvSpPr>
-          <p:cNvPr id="2" name="Tytuł 1">
-            <a:extLst>
-              <a:ext uri="{FF2B5EF4-FFF2-40B4-BE49-F238E27FC236}">
-                <a16:creationId xmlns:a16="http://schemas.microsoft.com/office/drawing/2014/main" id="{0AF2D8EB-077C-688F-8144-B3BF39FB470A}"/>
+                <a16:creationId xmlns:a16="http://schemas.microsoft.com/office/drawing/2014/main" xmlns="" id="{0AF2D8EB-077C-688F-8144-B3BF39FB470A}"/>
               </a:ext>
             </a:extLst>
           </p:cNvPr>
@@ -17591,7 +17817,7 @@
           <p:cNvPr id="3" name="Symbol zastępczy zawartości 2">
             <a:extLst>
               <a:ext uri="{FF2B5EF4-FFF2-40B4-BE49-F238E27FC236}">
-                <a16:creationId xmlns:a16="http://schemas.microsoft.com/office/drawing/2014/main" id="{7DAB67BA-069A-8DA1-DA48-46BB9D6B2C46}"/>
+                <a16:creationId xmlns:a16="http://schemas.microsoft.com/office/drawing/2014/main" xmlns="" id="{7DAB67BA-069A-8DA1-DA48-46BB9D6B2C46}"/>
               </a:ext>
             </a:extLst>
           </p:cNvPr>
@@ -17610,7 +17836,7 @@
         </p:spPr>
         <p:txBody>
           <a:bodyPr>
-            <a:normAutofit fontScale="92500" lnSpcReduction="10000"/>
+            <a:normAutofit lnSpcReduction="10000"/>
           </a:bodyPr>
           <a:lstStyle/>
           <a:p>
@@ -17685,117 +17911,7 @@
 </p:sld>
 </file>
 
-<file path=ppt/slides/slide5.xml><?xml version="1.0" encoding="utf-8"?>
-<p:sld xmlns:a="http://schemas.openxmlformats.org/drawingml/2006/main" xmlns:r="http://schemas.openxmlformats.org/officeDocument/2006/relationships" xmlns:p="http://schemas.openxmlformats.org/presentationml/2006/main">
-  <p:cSld>
-    <p:spTree>
-      <p:nvGrpSpPr>
-        <p:cNvPr id="1" name=""/>
-        <p:cNvGrpSpPr/>
-        <p:nvPr/>
-      </p:nvGrpSpPr>
-      <p:grpSpPr>
-        <a:xfrm>
-          <a:off x="0" y="0"/>
-          <a:ext cx="0" cy="0"/>
-          <a:chOff x="0" y="0"/>
-          <a:chExt cx="0" cy="0"/>
-        </a:xfrm>
-      </p:grpSpPr>
-      <p:sp>
-        <p:nvSpPr>
-          <p:cNvPr id="2" name="Tytuł 1">
-            <a:extLst>
-              <a:ext uri="{FF2B5EF4-FFF2-40B4-BE49-F238E27FC236}">
-                <a16:creationId xmlns:a16="http://schemas.microsoft.com/office/drawing/2014/main" id="{AEC81E11-21DA-AD99-885B-921B393F04B2}"/>
-              </a:ext>
-            </a:extLst>
-          </p:cNvPr>
-          <p:cNvSpPr>
-            <a:spLocks noGrp="1"/>
-          </p:cNvSpPr>
-          <p:nvPr>
-            <p:ph type="title"/>
-          </p:nvPr>
-        </p:nvSpPr>
-        <p:spPr>
-          <a:xfrm>
-            <a:off x="3162300" y="382905"/>
-            <a:ext cx="8553450" cy="1263649"/>
-          </a:xfrm>
-        </p:spPr>
-        <p:txBody>
-          <a:bodyPr/>
-          <a:lstStyle/>
-          <a:p>
-            <a:r>
-              <a:rPr lang="pl-PL" dirty="0"/>
-              <a:t>Diagram(-y) klas</a:t>
-            </a:r>
-          </a:p>
-        </p:txBody>
-      </p:sp>
-      <p:pic>
-        <p:nvPicPr>
-          <p:cNvPr id="2050" name="Picture 2">
-            <a:extLst>
-              <a:ext uri="{FF2B5EF4-FFF2-40B4-BE49-F238E27FC236}">
-                <a16:creationId xmlns:a16="http://schemas.microsoft.com/office/drawing/2014/main" id="{484E6758-3890-B231-2C3F-8C3C5D78E350}"/>
-              </a:ext>
-            </a:extLst>
-          </p:cNvPr>
-          <p:cNvPicPr>
-            <a:picLocks noChangeAspect="1" noChangeArrowheads="1"/>
-          </p:cNvPicPr>
-          <p:nvPr/>
-        </p:nvPicPr>
-        <p:blipFill>
-          <a:blip r:embed="rId2">
-            <a:extLst>
-              <a:ext uri="{28A0092B-C50C-407E-A947-70E740481C1C}">
-                <a14:useLocalDpi xmlns:a14="http://schemas.microsoft.com/office/drawing/2010/main" val="0"/>
-              </a:ext>
-            </a:extLst>
-          </a:blip>
-          <a:srcRect/>
-          <a:stretch>
-            <a:fillRect/>
-          </a:stretch>
-        </p:blipFill>
-        <p:spPr bwMode="auto">
-          <a:xfrm>
-            <a:off x="571500" y="1264166"/>
-            <a:ext cx="10877550" cy="5059325"/>
-          </a:xfrm>
-          <a:prstGeom prst="rect">
-            <a:avLst/>
-          </a:prstGeom>
-          <a:noFill/>
-          <a:extLst>
-            <a:ext uri="{909E8E84-426E-40DD-AFC4-6F175D3DCCD1}">
-              <a14:hiddenFill xmlns:a14="http://schemas.microsoft.com/office/drawing/2010/main">
-                <a:solidFill>
-                  <a:srgbClr val="FFFFFF"/>
-                </a:solidFill>
-              </a14:hiddenFill>
-            </a:ext>
-          </a:extLst>
-        </p:spPr>
-      </p:pic>
-    </p:spTree>
-    <p:extLst>
-      <p:ext uri="{BB962C8B-B14F-4D97-AF65-F5344CB8AC3E}">
-        <p14:creationId xmlns:p14="http://schemas.microsoft.com/office/powerpoint/2010/main" val="351388791"/>
-      </p:ext>
-    </p:extLst>
-  </p:cSld>
-  <p:clrMapOvr>
-    <a:masterClrMapping/>
-  </p:clrMapOvr>
-</p:sld>
-</file>
-
-<file path=ppt/slides/slide6.xml><?xml version="1.0" encoding="utf-8"?>
+<file path=ppt/slides/slide4.xml><?xml version="1.0" encoding="utf-8"?>
 <p:sld xmlns:a="http://schemas.openxmlformats.org/drawingml/2006/main" xmlns:r="http://schemas.openxmlformats.org/officeDocument/2006/relationships" xmlns:p="http://schemas.openxmlformats.org/presentationml/2006/main">
   <p:cSld>
     <p:bg>
@@ -17825,10 +17941,10 @@
           <p:cNvPr id="6155" name="Rectangle 6154">
             <a:extLst>
               <a:ext uri="{FF2B5EF4-FFF2-40B4-BE49-F238E27FC236}">
-                <a16:creationId xmlns:a16="http://schemas.microsoft.com/office/drawing/2014/main" id="{6B0479F5-59EA-43F3-BAFC-2606376EB662}"/>
+                <a16:creationId xmlns:a16="http://schemas.microsoft.com/office/drawing/2014/main" xmlns="" id="{6B0479F5-59EA-43F3-BAFC-2606376EB662}"/>
               </a:ext>
               <a:ext uri="{C183D7F6-B498-43B3-948B-1728B52AA6E4}">
-                <adec:decorative xmlns:adec="http://schemas.microsoft.com/office/drawing/2017/decorative" val="1"/>
+                <adec:decorative xmlns:adec="http://schemas.microsoft.com/office/drawing/2017/decorative" xmlns="" val="1"/>
               </a:ext>
             </a:extLst>
           </p:cNvPr>
@@ -17838,7 +17954,7 @@
           <p:nvPr>
             <p:extLst>
               <p:ext uri="{386F3935-93C4-4BCD-93E2-E3B085C9AB24}">
-                <p16:designElem xmlns:p16="http://schemas.microsoft.com/office/powerpoint/2015/main" val="1"/>
+                <p16:designElem xmlns:p16="http://schemas.microsoft.com/office/powerpoint/2015/main" xmlns="" val="1"/>
               </p:ext>
             </p:extLst>
           </p:nvPr>
@@ -17901,7 +18017,7 @@
           <p:cNvPr id="2" name="Tytuł 1">
             <a:extLst>
               <a:ext uri="{FF2B5EF4-FFF2-40B4-BE49-F238E27FC236}">
-                <a16:creationId xmlns:a16="http://schemas.microsoft.com/office/drawing/2014/main" id="{068D1B6A-AC4B-B161-049B-9FBF2D3A64A6}"/>
+                <a16:creationId xmlns:a16="http://schemas.microsoft.com/office/drawing/2014/main" xmlns="" id="{068D1B6A-AC4B-B161-049B-9FBF2D3A64A6}"/>
               </a:ext>
             </a:extLst>
           </p:cNvPr>
@@ -17914,7 +18030,7 @@
         </p:nvSpPr>
         <p:spPr>
           <a:xfrm>
-            <a:off x="1227151" y="782595"/>
+            <a:off x="1227151" y="1636035"/>
             <a:ext cx="9737698" cy="1103779"/>
           </a:xfrm>
         </p:spPr>
@@ -17926,8 +18042,20 @@
           <a:p>
             <a:pPr algn="ctr"/>
             <a:r>
-              <a:rPr lang="en-US" sz="6000"/>
-              <a:t>Propozycja interfejsu (UI)</a:t>
+              <a:rPr lang="en-US" sz="6000" dirty="0" err="1"/>
+              <a:t>Propozycja</a:t>
+            </a:r>
+            <a:r>
+              <a:rPr lang="en-US" sz="6000" dirty="0"/>
+              <a:t> </a:t>
+            </a:r>
+            <a:r>
+              <a:rPr lang="en-US" sz="6000" dirty="0" err="1"/>
+              <a:t>interfejsu</a:t>
+            </a:r>
+            <a:r>
+              <a:rPr lang="en-US" sz="6000" dirty="0"/>
+              <a:t> (UI)</a:t>
             </a:r>
           </a:p>
         </p:txBody>
@@ -17937,10 +18065,10 @@
           <p:cNvPr id="6157" name="Freeform: Shape 6156">
             <a:extLst>
               <a:ext uri="{FF2B5EF4-FFF2-40B4-BE49-F238E27FC236}">
-                <a16:creationId xmlns:a16="http://schemas.microsoft.com/office/drawing/2014/main" id="{A2D09E29-DA9C-48B4-8529-45E27815C2B6}"/>
+                <a16:creationId xmlns:a16="http://schemas.microsoft.com/office/drawing/2014/main" xmlns="" id="{A2D09E29-DA9C-48B4-8529-45E27815C2B6}"/>
               </a:ext>
               <a:ext uri="{C183D7F6-B498-43B3-948B-1728B52AA6E4}">
-                <adec:decorative xmlns:adec="http://schemas.microsoft.com/office/drawing/2017/decorative" val="1"/>
+                <adec:decorative xmlns:adec="http://schemas.microsoft.com/office/drawing/2017/decorative" xmlns="" val="1"/>
               </a:ext>
             </a:extLst>
           </p:cNvPr>
@@ -17950,7 +18078,7 @@
           <p:nvPr>
             <p:extLst>
               <p:ext uri="{386F3935-93C4-4BCD-93E2-E3B085C9AB24}">
-                <p16:designElem xmlns:p16="http://schemas.microsoft.com/office/powerpoint/2015/main" val="1"/>
+                <p16:designElem xmlns:p16="http://schemas.microsoft.com/office/powerpoint/2015/main" xmlns="" val="1"/>
               </p:ext>
             </p:extLst>
           </p:nvPr>
@@ -19762,10 +19890,10 @@
           <p:cNvPr id="6159" name="Freeform: Shape 6158">
             <a:extLst>
               <a:ext uri="{FF2B5EF4-FFF2-40B4-BE49-F238E27FC236}">
-                <a16:creationId xmlns:a16="http://schemas.microsoft.com/office/drawing/2014/main" id="{8E3844D4-5ADD-481B-AF9C-49AABAD25626}"/>
+                <a16:creationId xmlns:a16="http://schemas.microsoft.com/office/drawing/2014/main" xmlns="" id="{8E3844D4-5ADD-481B-AF9C-49AABAD25626}"/>
               </a:ext>
               <a:ext uri="{C183D7F6-B498-43B3-948B-1728B52AA6E4}">
-                <adec:decorative xmlns:adec="http://schemas.microsoft.com/office/drawing/2017/decorative" val="1"/>
+                <adec:decorative xmlns:adec="http://schemas.microsoft.com/office/drawing/2017/decorative" xmlns="" val="1"/>
               </a:ext>
             </a:extLst>
           </p:cNvPr>
@@ -19775,7 +19903,7 @@
           <p:nvPr>
             <p:extLst>
               <p:ext uri="{386F3935-93C4-4BCD-93E2-E3B085C9AB24}">
-                <p16:designElem xmlns:p16="http://schemas.microsoft.com/office/powerpoint/2015/main" val="1"/>
+                <p16:designElem xmlns:p16="http://schemas.microsoft.com/office/powerpoint/2015/main" xmlns="" val="1"/>
               </p:ext>
             </p:extLst>
           </p:nvPr>
@@ -21586,148 +21714,194 @@
           </a:p>
         </p:txBody>
       </p:sp>
+    </p:spTree>
+    <p:extLst>
+      <p:ext uri="{BB962C8B-B14F-4D97-AF65-F5344CB8AC3E}">
+        <p14:creationId xmlns:p14="http://schemas.microsoft.com/office/powerpoint/2010/main" val="3036335420"/>
+      </p:ext>
+    </p:extLst>
+  </p:cSld>
+  <p:clrMapOvr>
+    <a:masterClrMapping/>
+  </p:clrMapOvr>
+</p:sld>
+</file>
+
+<file path=ppt/slides/slide5.xml><?xml version="1.0" encoding="utf-8"?>
+<p:sld xmlns:a="http://schemas.openxmlformats.org/drawingml/2006/main" xmlns:r="http://schemas.openxmlformats.org/officeDocument/2006/relationships" xmlns:p="http://schemas.openxmlformats.org/presentationml/2006/main">
+  <p:cSld>
+    <p:spTree>
+      <p:nvGrpSpPr>
+        <p:cNvPr id="1" name=""/>
+        <p:cNvGrpSpPr/>
+        <p:nvPr/>
+      </p:nvGrpSpPr>
+      <p:grpSpPr>
+        <a:xfrm>
+          <a:off x="0" y="0"/>
+          <a:ext cx="0" cy="0"/>
+          <a:chOff x="0" y="0"/>
+          <a:chExt cx="0" cy="0"/>
+        </a:xfrm>
+      </p:grpSpPr>
+      <p:sp>
+        <p:nvSpPr>
+          <p:cNvPr id="2" name="Tytuł 1"/>
+          <p:cNvSpPr>
+            <a:spLocks noGrp="1"/>
+          </p:cNvSpPr>
+          <p:nvPr>
+            <p:ph type="title"/>
+          </p:nvPr>
+        </p:nvSpPr>
+        <p:spPr/>
+        <p:txBody>
+          <a:bodyPr/>
+          <a:lstStyle/>
+          <a:p>
+            <a:endParaRPr lang="pl-PL"/>
+          </a:p>
+        </p:txBody>
+      </p:sp>
+      <p:sp>
+        <p:nvSpPr>
+          <p:cNvPr id="3" name="Symbol zastępczy zawartości 2"/>
+          <p:cNvSpPr>
+            <a:spLocks noGrp="1"/>
+          </p:cNvSpPr>
+          <p:nvPr>
+            <p:ph idx="1"/>
+          </p:nvPr>
+        </p:nvSpPr>
+        <p:spPr/>
+        <p:txBody>
+          <a:bodyPr/>
+          <a:lstStyle/>
+          <a:p>
+            <a:endParaRPr lang="pl-PL"/>
+          </a:p>
+        </p:txBody>
+      </p:sp>
       <p:pic>
         <p:nvPicPr>
-          <p:cNvPr id="6148" name="Picture 4">
-            <a:extLst>
-              <a:ext uri="{FF2B5EF4-FFF2-40B4-BE49-F238E27FC236}">
-                <a16:creationId xmlns:a16="http://schemas.microsoft.com/office/drawing/2014/main" id="{BFF32F4B-AB09-E5F6-DADB-71755F3AAA9A}"/>
-              </a:ext>
-            </a:extLst>
-          </p:cNvPr>
+          <p:cNvPr id="4" name="Obraz 3"/>
           <p:cNvPicPr>
-            <a:picLocks noChangeAspect="1" noChangeArrowheads="1"/>
+            <a:picLocks noChangeAspect="1"/>
           </p:cNvPicPr>
           <p:nvPr/>
         </p:nvPicPr>
         <p:blipFill>
-          <a:blip r:embed="rId3">
-            <a:extLst>
-              <a:ext uri="{28A0092B-C50C-407E-A947-70E740481C1C}">
-                <a14:useLocalDpi xmlns:a14="http://schemas.microsoft.com/office/drawing/2010/main" val="0"/>
-              </a:ext>
-            </a:extLst>
-          </a:blip>
+          <a:blip r:embed="rId2"/>
           <a:stretch>
             <a:fillRect/>
           </a:stretch>
         </p:blipFill>
-        <p:spPr bwMode="auto">
+        <p:spPr>
           <a:xfrm>
-            <a:off x="619125" y="4086781"/>
-            <a:ext cx="2904900" cy="2665246"/>
+            <a:off x="380202" y="452022"/>
+            <a:ext cx="11431595" cy="5953956"/>
           </a:xfrm>
           <a:prstGeom prst="rect">
             <a:avLst/>
           </a:prstGeom>
-          <a:noFill/>
-          <a:extLst>
-            <a:ext uri="{909E8E84-426E-40DD-AFC4-6F175D3DCCD1}">
-              <a14:hiddenFill xmlns:a14="http://schemas.microsoft.com/office/drawing/2010/main">
-                <a:solidFill>
-                  <a:srgbClr val="FFFFFF"/>
-                </a:solidFill>
-              </a14:hiddenFill>
-            </a:ext>
-          </a:extLst>
-        </p:spPr>
-      </p:pic>
-      <p:pic>
-        <p:nvPicPr>
-          <p:cNvPr id="6150" name="Picture 6">
-            <a:extLst>
-              <a:ext uri="{FF2B5EF4-FFF2-40B4-BE49-F238E27FC236}">
-                <a16:creationId xmlns:a16="http://schemas.microsoft.com/office/drawing/2014/main" id="{9774A688-9F07-0163-A792-6D988E469542}"/>
-              </a:ext>
-            </a:extLst>
-          </p:cNvPr>
-          <p:cNvPicPr>
-            <a:picLocks noChangeAspect="1" noChangeArrowheads="1"/>
-          </p:cNvPicPr>
-          <p:nvPr/>
-        </p:nvPicPr>
-        <p:blipFill>
-          <a:blip r:embed="rId4">
-            <a:extLst>
-              <a:ext uri="{28A0092B-C50C-407E-A947-70E740481C1C}">
-                <a14:useLocalDpi xmlns:a14="http://schemas.microsoft.com/office/drawing/2010/main" val="0"/>
-              </a:ext>
-            </a:extLst>
-          </a:blip>
-          <a:stretch>
-            <a:fillRect/>
-          </a:stretch>
-        </p:blipFill>
-        <p:spPr bwMode="auto">
-          <a:xfrm>
-            <a:off x="4574765" y="3883832"/>
-            <a:ext cx="2568882" cy="2851895"/>
-          </a:xfrm>
-          <a:prstGeom prst="rect">
-            <a:avLst/>
-          </a:prstGeom>
-          <a:noFill/>
-          <a:extLst>
-            <a:ext uri="{909E8E84-426E-40DD-AFC4-6F175D3DCCD1}">
-              <a14:hiddenFill xmlns:a14="http://schemas.microsoft.com/office/drawing/2010/main">
-                <a:solidFill>
-                  <a:srgbClr val="FFFFFF"/>
-                </a:solidFill>
-              </a14:hiddenFill>
-            </a:ext>
-          </a:extLst>
-        </p:spPr>
-      </p:pic>
-      <p:pic>
-        <p:nvPicPr>
-          <p:cNvPr id="6146" name="Picture 2">
-            <a:extLst>
-              <a:ext uri="{FF2B5EF4-FFF2-40B4-BE49-F238E27FC236}">
-                <a16:creationId xmlns:a16="http://schemas.microsoft.com/office/drawing/2014/main" id="{DEB16897-46BA-12E9-9108-F7907BBB1720}"/>
-              </a:ext>
-            </a:extLst>
-          </p:cNvPr>
-          <p:cNvPicPr>
-            <a:picLocks noChangeAspect="1" noChangeArrowheads="1"/>
-          </p:cNvPicPr>
-          <p:nvPr/>
-        </p:nvPicPr>
-        <p:blipFill>
-          <a:blip r:embed="rId5">
-            <a:extLst>
-              <a:ext uri="{28A0092B-C50C-407E-A947-70E740481C1C}">
-                <a14:useLocalDpi xmlns:a14="http://schemas.microsoft.com/office/drawing/2010/main" val="0"/>
-              </a:ext>
-            </a:extLst>
-          </a:blip>
-          <a:stretch>
-            <a:fillRect/>
-          </a:stretch>
-        </p:blipFill>
-        <p:spPr bwMode="auto">
-          <a:xfrm>
-            <a:off x="7474177" y="4086781"/>
-            <a:ext cx="3543739" cy="2648946"/>
-          </a:xfrm>
-          <a:prstGeom prst="rect">
-            <a:avLst/>
-          </a:prstGeom>
-          <a:noFill/>
-          <a:extLst>
-            <a:ext uri="{909E8E84-426E-40DD-AFC4-6F175D3DCCD1}">
-              <a14:hiddenFill xmlns:a14="http://schemas.microsoft.com/office/drawing/2010/main">
-                <a:solidFill>
-                  <a:srgbClr val="FFFFFF"/>
-                </a:solidFill>
-              </a14:hiddenFill>
-            </a:ext>
-          </a:extLst>
         </p:spPr>
       </p:pic>
     </p:spTree>
     <p:extLst>
       <p:ext uri="{BB962C8B-B14F-4D97-AF65-F5344CB8AC3E}">
-        <p14:creationId xmlns:p14="http://schemas.microsoft.com/office/powerpoint/2010/main" val="3036335420"/>
+        <p14:creationId xmlns:p14="http://schemas.microsoft.com/office/powerpoint/2010/main" val="4193582634"/>
+      </p:ext>
+    </p:extLst>
+  </p:cSld>
+  <p:clrMapOvr>
+    <a:masterClrMapping/>
+  </p:clrMapOvr>
+</p:sld>
+</file>
+
+<file path=ppt/slides/slide6.xml><?xml version="1.0" encoding="utf-8"?>
+<p:sld xmlns:a="http://schemas.openxmlformats.org/drawingml/2006/main" xmlns:r="http://schemas.openxmlformats.org/officeDocument/2006/relationships" xmlns:p="http://schemas.openxmlformats.org/presentationml/2006/main">
+  <p:cSld>
+    <p:spTree>
+      <p:nvGrpSpPr>
+        <p:cNvPr id="1" name=""/>
+        <p:cNvGrpSpPr/>
+        <p:nvPr/>
+      </p:nvGrpSpPr>
+      <p:grpSpPr>
+        <a:xfrm>
+          <a:off x="0" y="0"/>
+          <a:ext cx="0" cy="0"/>
+          <a:chOff x="0" y="0"/>
+          <a:chExt cx="0" cy="0"/>
+        </a:xfrm>
+      </p:grpSpPr>
+      <p:sp>
+        <p:nvSpPr>
+          <p:cNvPr id="2" name="Tytuł 1"/>
+          <p:cNvSpPr>
+            <a:spLocks noGrp="1"/>
+          </p:cNvSpPr>
+          <p:nvPr>
+            <p:ph type="title"/>
+          </p:nvPr>
+        </p:nvSpPr>
+        <p:spPr/>
+        <p:txBody>
+          <a:bodyPr/>
+          <a:lstStyle/>
+          <a:p>
+            <a:endParaRPr lang="pl-PL"/>
+          </a:p>
+        </p:txBody>
+      </p:sp>
+      <p:sp>
+        <p:nvSpPr>
+          <p:cNvPr id="3" name="Symbol zastępczy zawartości 2"/>
+          <p:cNvSpPr>
+            <a:spLocks noGrp="1"/>
+          </p:cNvSpPr>
+          <p:nvPr>
+            <p:ph idx="1"/>
+          </p:nvPr>
+        </p:nvSpPr>
+        <p:spPr/>
+        <p:txBody>
+          <a:bodyPr/>
+          <a:lstStyle/>
+          <a:p>
+            <a:endParaRPr lang="pl-PL"/>
+          </a:p>
+        </p:txBody>
+      </p:sp>
+      <p:pic>
+        <p:nvPicPr>
+          <p:cNvPr id="4" name="Obraz 3"/>
+          <p:cNvPicPr>
+            <a:picLocks noChangeAspect="1"/>
+          </p:cNvPicPr>
+          <p:nvPr/>
+        </p:nvPicPr>
+        <p:blipFill>
+          <a:blip r:embed="rId2"/>
+          <a:stretch>
+            <a:fillRect/>
+          </a:stretch>
+        </p:blipFill>
+        <p:spPr>
+          <a:xfrm>
+            <a:off x="610843" y="801189"/>
+            <a:ext cx="10970313" cy="5656568"/>
+          </a:xfrm>
+          <a:prstGeom prst="rect">
+            <a:avLst/>
+          </a:prstGeom>
+        </p:spPr>
+      </p:pic>
+    </p:spTree>
+    <p:extLst>
+      <p:ext uri="{BB962C8B-B14F-4D97-AF65-F5344CB8AC3E}">
+        <p14:creationId xmlns:p14="http://schemas.microsoft.com/office/powerpoint/2010/main" val="3119275984"/>
       </p:ext>
     </p:extLst>
   </p:cSld>
@@ -21756,10 +21930,102 @@
       </p:grpSpPr>
       <p:sp>
         <p:nvSpPr>
+          <p:cNvPr id="2" name="Tytuł 1"/>
+          <p:cNvSpPr>
+            <a:spLocks noGrp="1"/>
+          </p:cNvSpPr>
+          <p:nvPr>
+            <p:ph type="title"/>
+          </p:nvPr>
+        </p:nvSpPr>
+        <p:spPr/>
+        <p:txBody>
+          <a:bodyPr/>
+          <a:lstStyle/>
+          <a:p>
+            <a:endParaRPr lang="pl-PL"/>
+          </a:p>
+        </p:txBody>
+      </p:sp>
+      <p:sp>
+        <p:nvSpPr>
+          <p:cNvPr id="3" name="Symbol zastępczy zawartości 2"/>
+          <p:cNvSpPr>
+            <a:spLocks noGrp="1"/>
+          </p:cNvSpPr>
+          <p:nvPr>
+            <p:ph idx="1"/>
+          </p:nvPr>
+        </p:nvSpPr>
+        <p:spPr/>
+        <p:txBody>
+          <a:bodyPr/>
+          <a:lstStyle/>
+          <a:p>
+            <a:endParaRPr lang="pl-PL"/>
+          </a:p>
+        </p:txBody>
+      </p:sp>
+      <p:pic>
+        <p:nvPicPr>
+          <p:cNvPr id="4" name="Obraz 3"/>
+          <p:cNvPicPr>
+            <a:picLocks noChangeAspect="1"/>
+          </p:cNvPicPr>
+          <p:nvPr/>
+        </p:nvPicPr>
+        <p:blipFill>
+          <a:blip r:embed="rId2"/>
+          <a:stretch>
+            <a:fillRect/>
+          </a:stretch>
+        </p:blipFill>
+        <p:spPr>
+          <a:xfrm>
+            <a:off x="695118" y="712028"/>
+            <a:ext cx="10801763" cy="5600137"/>
+          </a:xfrm>
+          <a:prstGeom prst="rect">
+            <a:avLst/>
+          </a:prstGeom>
+        </p:spPr>
+      </p:pic>
+    </p:spTree>
+    <p:extLst>
+      <p:ext uri="{BB962C8B-B14F-4D97-AF65-F5344CB8AC3E}">
+        <p14:creationId xmlns:p14="http://schemas.microsoft.com/office/powerpoint/2010/main" val="4049658094"/>
+      </p:ext>
+    </p:extLst>
+  </p:cSld>
+  <p:clrMapOvr>
+    <a:masterClrMapping/>
+  </p:clrMapOvr>
+</p:sld>
+</file>
+
+<file path=ppt/slides/slide8.xml><?xml version="1.0" encoding="utf-8"?>
+<p:sld xmlns:a="http://schemas.openxmlformats.org/drawingml/2006/main" xmlns:r="http://schemas.openxmlformats.org/officeDocument/2006/relationships" xmlns:p="http://schemas.openxmlformats.org/presentationml/2006/main">
+  <p:cSld>
+    <p:spTree>
+      <p:nvGrpSpPr>
+        <p:cNvPr id="1" name=""/>
+        <p:cNvGrpSpPr/>
+        <p:nvPr/>
+      </p:nvGrpSpPr>
+      <p:grpSpPr>
+        <a:xfrm>
+          <a:off x="0" y="0"/>
+          <a:ext cx="0" cy="0"/>
+          <a:chOff x="0" y="0"/>
+          <a:chExt cx="0" cy="0"/>
+        </a:xfrm>
+      </p:grpSpPr>
+      <p:sp>
+        <p:nvSpPr>
           <p:cNvPr id="2" name="Tytuł 1">
             <a:extLst>
               <a:ext uri="{FF2B5EF4-FFF2-40B4-BE49-F238E27FC236}">
-                <a16:creationId xmlns:a16="http://schemas.microsoft.com/office/drawing/2014/main" id="{B210F7C7-6A93-C92E-7610-6B77871A9F00}"/>
+                <a16:creationId xmlns:a16="http://schemas.microsoft.com/office/drawing/2014/main" xmlns="" id="{B210F7C7-6A93-C92E-7610-6B77871A9F00}"/>
               </a:ext>
             </a:extLst>
           </p:cNvPr>
@@ -21793,7 +22059,7 @@
           <p:cNvPr id="3074" name="Picture 2">
             <a:extLst>
               <a:ext uri="{FF2B5EF4-FFF2-40B4-BE49-F238E27FC236}">
-                <a16:creationId xmlns:a16="http://schemas.microsoft.com/office/drawing/2014/main" id="{66DCDD5F-6886-33D4-4E2D-E741EAB69E9B}"/>
+                <a16:creationId xmlns:a16="http://schemas.microsoft.com/office/drawing/2014/main" xmlns="" id="{66DCDD5F-6886-33D4-4E2D-E741EAB69E9B}"/>
               </a:ext>
             </a:extLst>
           </p:cNvPr>
@@ -21840,7 +22106,7 @@
           <p:cNvPr id="4" name="pole tekstowe 3">
             <a:extLst>
               <a:ext uri="{FF2B5EF4-FFF2-40B4-BE49-F238E27FC236}">
-                <a16:creationId xmlns:a16="http://schemas.microsoft.com/office/drawing/2014/main" id="{EFA705A3-9B07-0836-D7D6-D23E52C1306C}"/>
+                <a16:creationId xmlns:a16="http://schemas.microsoft.com/office/drawing/2014/main" xmlns="" id="{EFA705A3-9B07-0836-D7D6-D23E52C1306C}"/>
               </a:ext>
             </a:extLst>
           </p:cNvPr>
@@ -21941,17 +22207,9 @@
 </p:sld>
 </file>
 
-<file path=ppt/slides/slide8.xml><?xml version="1.0" encoding="utf-8"?>
+<file path=ppt/slides/slide9.xml><?xml version="1.0" encoding="utf-8"?>
 <p:sld xmlns:a="http://schemas.openxmlformats.org/drawingml/2006/main" xmlns:r="http://schemas.openxmlformats.org/officeDocument/2006/relationships" xmlns:p="http://schemas.openxmlformats.org/presentationml/2006/main">
   <p:cSld>
-    <p:bg>
-      <p:bgPr>
-        <a:solidFill>
-          <a:schemeClr val="bg1"/>
-        </a:solidFill>
-        <a:effectLst/>
-      </p:bgPr>
-    </p:bg>
     <p:spTree>
       <p:nvGrpSpPr>
         <p:cNvPr id="1" name=""/>
@@ -21966,88 +22224,12 @@
           <a:chExt cx="0" cy="0"/>
         </a:xfrm>
       </p:grpSpPr>
-      <p:sp useBgFill="1">
-        <p:nvSpPr>
-          <p:cNvPr id="4103" name="Rectangle 4102">
-            <a:extLst>
-              <a:ext uri="{FF2B5EF4-FFF2-40B4-BE49-F238E27FC236}">
-                <a16:creationId xmlns:a16="http://schemas.microsoft.com/office/drawing/2014/main" id="{5964CBE2-084A-47DF-A704-CF5F6217B569}"/>
-              </a:ext>
-              <a:ext uri="{C183D7F6-B498-43B3-948B-1728B52AA6E4}">
-                <adec:decorative xmlns:adec="http://schemas.microsoft.com/office/drawing/2017/decorative" val="1"/>
-              </a:ext>
-            </a:extLst>
-          </p:cNvPr>
-          <p:cNvSpPr>
-            <a:spLocks noGrp="1" noRot="1" noChangeAspect="1" noMove="1" noResize="1" noEditPoints="1" noAdjustHandles="1" noChangeArrowheads="1" noChangeShapeType="1" noTextEdit="1"/>
-          </p:cNvSpPr>
-          <p:nvPr>
-            <p:extLst>
-              <p:ext uri="{386F3935-93C4-4BCD-93E2-E3B085C9AB24}">
-                <p16:designElem xmlns:p16="http://schemas.microsoft.com/office/powerpoint/2015/main" val="1"/>
-              </p:ext>
-            </p:extLst>
-          </p:nvPr>
-        </p:nvSpPr>
-        <p:spPr>
-          <a:xfrm>
-            <a:off x="0" y="0"/>
-            <a:ext cx="12192000" cy="6858000"/>
-          </a:xfrm>
-          <a:prstGeom prst="rect">
-            <a:avLst/>
-          </a:prstGeom>
-          <a:ln w="12700" cap="flat" cmpd="sng" algn="ctr">
-            <a:noFill/>
-            <a:prstDash val="solid"/>
-            <a:miter lim="800000"/>
-          </a:ln>
-          <a:effectLst/>
-          <a:extLst>
-            <a:ext uri="{91240B29-F687-4F45-9708-019B960494DF}">
-              <a14:hiddenLine xmlns:a14="http://schemas.microsoft.com/office/drawing/2010/main" w="12700" cap="flat" cmpd="sng" algn="ctr">
-                <a:solidFill>
-                  <a:schemeClr val="accent1">
-                    <a:shade val="50000"/>
-                  </a:schemeClr>
-                </a:solidFill>
-                <a:prstDash val="solid"/>
-                <a:miter lim="800000"/>
-              </a14:hiddenLine>
-            </a:ext>
-          </a:extLst>
-        </p:spPr>
-        <p:style>
-          <a:lnRef idx="2">
-            <a:schemeClr val="accent1">
-              <a:shade val="50000"/>
-            </a:schemeClr>
-          </a:lnRef>
-          <a:fillRef idx="1">
-            <a:schemeClr val="accent1"/>
-          </a:fillRef>
-          <a:effectRef idx="0">
-            <a:schemeClr val="accent1"/>
-          </a:effectRef>
-          <a:fontRef idx="minor">
-            <a:schemeClr val="lt1"/>
-          </a:fontRef>
-        </p:style>
-        <p:txBody>
-          <a:bodyPr rtlCol="0" anchor="ctr"/>
-          <a:lstStyle/>
-          <a:p>
-            <a:pPr algn="ctr"/>
-            <a:endParaRPr lang="en-US"/>
-          </a:p>
-        </p:txBody>
-      </p:sp>
       <p:sp>
         <p:nvSpPr>
           <p:cNvPr id="2" name="Tytuł 1">
             <a:extLst>
               <a:ext uri="{FF2B5EF4-FFF2-40B4-BE49-F238E27FC236}">
-                <a16:creationId xmlns:a16="http://schemas.microsoft.com/office/drawing/2014/main" id="{1B49750A-8363-07A0-C411-58EF47897DD3}"/>
+                <a16:creationId xmlns:a16="http://schemas.microsoft.com/office/drawing/2014/main" xmlns="" id="{717E4EAB-AD00-95B5-F88C-2994713DE1A7}"/>
               </a:ext>
             </a:extLst>
           </p:cNvPr>
@@ -22060,280 +22242,58 @@
         </p:nvSpPr>
         <p:spPr>
           <a:xfrm>
-            <a:off x="762000" y="762001"/>
-            <a:ext cx="6096000" cy="2747962"/>
+            <a:off x="550632" y="1054173"/>
+            <a:ext cx="10750296" cy="1263649"/>
           </a:xfrm>
         </p:spPr>
         <p:txBody>
-          <a:bodyPr vert="horz" lIns="91440" tIns="45720" rIns="91440" bIns="45720" rtlCol="0" anchor="b" anchorCtr="0">
-            <a:normAutofit/>
+          <a:bodyPr>
+            <a:normAutofit fontScale="90000"/>
           </a:bodyPr>
           <a:lstStyle/>
           <a:p>
             <a:r>
-              <a:rPr lang="en-US" sz="8000"/>
-              <a:t>Diagramy czynności</a:t>
+              <a:rPr lang="pl-PL" b="1" dirty="0"/>
+              <a:t>Oszacowanie liczby i typów potrzebnych stanowisk pracy użytkowników systemu</a:t>
             </a:r>
+            <a:endParaRPr lang="pl-PL" dirty="0"/>
           </a:p>
         </p:txBody>
       </p:sp>
       <p:pic>
         <p:nvPicPr>
-          <p:cNvPr id="4098" name="Picture 2">
+          <p:cNvPr id="7" name="Obraz 6">
             <a:extLst>
               <a:ext uri="{FF2B5EF4-FFF2-40B4-BE49-F238E27FC236}">
-                <a16:creationId xmlns:a16="http://schemas.microsoft.com/office/drawing/2014/main" id="{609DCA0B-36E0-0B6B-1FDB-F34FC54D21F9}"/>
+                <a16:creationId xmlns:a16="http://schemas.microsoft.com/office/drawing/2014/main" xmlns="" id="{D1E12CA6-C5DC-C346-E604-ED1E7D302712}"/>
               </a:ext>
             </a:extLst>
           </p:cNvPr>
           <p:cNvPicPr>
-            <a:picLocks noChangeAspect="1" noChangeArrowheads="1"/>
+            <a:picLocks noChangeAspect="1"/>
           </p:cNvPicPr>
           <p:nvPr/>
         </p:nvPicPr>
         <p:blipFill>
-          <a:blip r:embed="rId2">
-            <a:extLst>
-              <a:ext uri="{28A0092B-C50C-407E-A947-70E740481C1C}">
-                <a14:useLocalDpi xmlns:a14="http://schemas.microsoft.com/office/drawing/2010/main" val="0"/>
-              </a:ext>
-            </a:extLst>
-          </a:blip>
+          <a:blip r:embed="rId2"/>
           <a:stretch>
             <a:fillRect/>
           </a:stretch>
         </p:blipFill>
-        <p:spPr bwMode="auto">
+        <p:spPr>
           <a:xfrm>
-            <a:off x="6486525" y="582385"/>
-            <a:ext cx="5257799" cy="6008914"/>
+            <a:off x="489949" y="2933602"/>
+            <a:ext cx="10871663" cy="2105123"/>
           </a:xfrm>
           <a:prstGeom prst="rect">
             <a:avLst/>
           </a:prstGeom>
-          <a:noFill/>
-          <a:extLst>
-            <a:ext uri="{909E8E84-426E-40DD-AFC4-6F175D3DCCD1}">
-              <a14:hiddenFill xmlns:a14="http://schemas.microsoft.com/office/drawing/2010/main">
-                <a:solidFill>
-                  <a:srgbClr val="FFFFFF"/>
-                </a:solidFill>
-              </a14:hiddenFill>
-            </a:ext>
-          </a:extLst>
         </p:spPr>
       </p:pic>
     </p:spTree>
     <p:extLst>
       <p:ext uri="{BB962C8B-B14F-4D97-AF65-F5344CB8AC3E}">
-        <p14:creationId xmlns:p14="http://schemas.microsoft.com/office/powerpoint/2010/main" val="3021713029"/>
-      </p:ext>
-    </p:extLst>
-  </p:cSld>
-  <p:clrMapOvr>
-    <a:masterClrMapping/>
-  </p:clrMapOvr>
-</p:sld>
-</file>
-
-<file path=ppt/slides/slide9.xml><?xml version="1.0" encoding="utf-8"?>
-<p:sld xmlns:a="http://schemas.openxmlformats.org/drawingml/2006/main" xmlns:r="http://schemas.openxmlformats.org/officeDocument/2006/relationships" xmlns:p="http://schemas.openxmlformats.org/presentationml/2006/main">
-  <p:cSld>
-    <p:bg>
-      <p:bgPr>
-        <a:solidFill>
-          <a:schemeClr val="bg1"/>
-        </a:solidFill>
-        <a:effectLst/>
-      </p:bgPr>
-    </p:bg>
-    <p:spTree>
-      <p:nvGrpSpPr>
-        <p:cNvPr id="1" name=""/>
-        <p:cNvGrpSpPr/>
-        <p:nvPr/>
-      </p:nvGrpSpPr>
-      <p:grpSpPr>
-        <a:xfrm>
-          <a:off x="0" y="0"/>
-          <a:ext cx="0" cy="0"/>
-          <a:chOff x="0" y="0"/>
-          <a:chExt cx="0" cy="0"/>
-        </a:xfrm>
-      </p:grpSpPr>
-      <p:sp useBgFill="1">
-        <p:nvSpPr>
-          <p:cNvPr id="5127" name="Rectangle 5126">
-            <a:extLst>
-              <a:ext uri="{FF2B5EF4-FFF2-40B4-BE49-F238E27FC236}">
-                <a16:creationId xmlns:a16="http://schemas.microsoft.com/office/drawing/2014/main" id="{5964CBE2-084A-47DF-A704-CF5F6217B569}"/>
-              </a:ext>
-              <a:ext uri="{C183D7F6-B498-43B3-948B-1728B52AA6E4}">
-                <adec:decorative xmlns:adec="http://schemas.microsoft.com/office/drawing/2017/decorative" val="1"/>
-              </a:ext>
-            </a:extLst>
-          </p:cNvPr>
-          <p:cNvSpPr>
-            <a:spLocks noGrp="1" noRot="1" noChangeAspect="1" noMove="1" noResize="1" noEditPoints="1" noAdjustHandles="1" noChangeArrowheads="1" noChangeShapeType="1" noTextEdit="1"/>
-          </p:cNvSpPr>
-          <p:nvPr>
-            <p:extLst>
-              <p:ext uri="{386F3935-93C4-4BCD-93E2-E3B085C9AB24}">
-                <p16:designElem xmlns:p16="http://schemas.microsoft.com/office/powerpoint/2015/main" val="1"/>
-              </p:ext>
-            </p:extLst>
-          </p:nvPr>
-        </p:nvSpPr>
-        <p:spPr>
-          <a:xfrm>
-            <a:off x="0" y="0"/>
-            <a:ext cx="12192000" cy="6858000"/>
-          </a:xfrm>
-          <a:prstGeom prst="rect">
-            <a:avLst/>
-          </a:prstGeom>
-          <a:ln w="12700" cap="flat" cmpd="sng" algn="ctr">
-            <a:noFill/>
-            <a:prstDash val="solid"/>
-            <a:miter lim="800000"/>
-          </a:ln>
-          <a:effectLst/>
-          <a:extLst>
-            <a:ext uri="{91240B29-F687-4F45-9708-019B960494DF}">
-              <a14:hiddenLine xmlns:a14="http://schemas.microsoft.com/office/drawing/2010/main" w="12700" cap="flat" cmpd="sng" algn="ctr">
-                <a:solidFill>
-                  <a:schemeClr val="accent1">
-                    <a:shade val="50000"/>
-                  </a:schemeClr>
-                </a:solidFill>
-                <a:prstDash val="solid"/>
-                <a:miter lim="800000"/>
-              </a14:hiddenLine>
-            </a:ext>
-          </a:extLst>
-        </p:spPr>
-        <p:style>
-          <a:lnRef idx="2">
-            <a:schemeClr val="accent1">
-              <a:shade val="50000"/>
-            </a:schemeClr>
-          </a:lnRef>
-          <a:fillRef idx="1">
-            <a:schemeClr val="accent1"/>
-          </a:fillRef>
-          <a:effectRef idx="0">
-            <a:schemeClr val="accent1"/>
-          </a:effectRef>
-          <a:fontRef idx="minor">
-            <a:schemeClr val="lt1"/>
-          </a:fontRef>
-        </p:style>
-        <p:txBody>
-          <a:bodyPr rtlCol="0" anchor="ctr"/>
-          <a:lstStyle/>
-          <a:p>
-            <a:pPr algn="ctr"/>
-            <a:endParaRPr lang="en-US"/>
-          </a:p>
-        </p:txBody>
-      </p:sp>
-      <p:sp>
-        <p:nvSpPr>
-          <p:cNvPr id="2" name="Tytuł 1">
-            <a:extLst>
-              <a:ext uri="{FF2B5EF4-FFF2-40B4-BE49-F238E27FC236}">
-                <a16:creationId xmlns:a16="http://schemas.microsoft.com/office/drawing/2014/main" id="{B1BEC6BF-0521-91FD-AAF6-F943312B5DEB}"/>
-              </a:ext>
-            </a:extLst>
-          </p:cNvPr>
-          <p:cNvSpPr>
-            <a:spLocks noGrp="1"/>
-          </p:cNvSpPr>
-          <p:nvPr>
-            <p:ph type="title"/>
-          </p:nvPr>
-        </p:nvSpPr>
-        <p:spPr>
-          <a:xfrm>
-            <a:off x="95251" y="762000"/>
-            <a:ext cx="4695826" cy="4514849"/>
-          </a:xfrm>
-        </p:spPr>
-        <p:txBody>
-          <a:bodyPr vert="horz" lIns="91440" tIns="45720" rIns="91440" bIns="45720" rtlCol="0" anchor="b" anchorCtr="0">
-            <a:normAutofit/>
-          </a:bodyPr>
-          <a:lstStyle/>
-          <a:p>
-            <a:r>
-              <a:rPr lang="en-US" sz="8000" dirty="0" err="1"/>
-              <a:t>Perspektywa</a:t>
-            </a:r>
-            <a:r>
-              <a:rPr lang="en-US" sz="8000" dirty="0"/>
-              <a:t> </a:t>
-            </a:r>
-            <a:r>
-              <a:rPr lang="en-US" sz="8000" dirty="0" err="1"/>
-              <a:t>projektowa</a:t>
-            </a:r>
-            <a:r>
-              <a:rPr lang="en-US" sz="8000" dirty="0"/>
-              <a:t>:</a:t>
-            </a:r>
-          </a:p>
-        </p:txBody>
-      </p:sp>
-      <p:pic>
-        <p:nvPicPr>
-          <p:cNvPr id="5122" name="Picture 2">
-            <a:extLst>
-              <a:ext uri="{FF2B5EF4-FFF2-40B4-BE49-F238E27FC236}">
-                <a16:creationId xmlns:a16="http://schemas.microsoft.com/office/drawing/2014/main" id="{D8604E8C-D1B3-C0AE-32CA-01A93D0B9E04}"/>
-              </a:ext>
-            </a:extLst>
-          </p:cNvPr>
-          <p:cNvPicPr>
-            <a:picLocks noChangeAspect="1" noChangeArrowheads="1"/>
-          </p:cNvPicPr>
-          <p:nvPr/>
-        </p:nvPicPr>
-        <p:blipFill>
-          <a:blip r:embed="rId2">
-            <a:extLst>
-              <a:ext uri="{28A0092B-C50C-407E-A947-70E740481C1C}">
-                <a14:useLocalDpi xmlns:a14="http://schemas.microsoft.com/office/drawing/2010/main" val="0"/>
-              </a:ext>
-            </a:extLst>
-          </a:blip>
-          <a:stretch>
-            <a:fillRect/>
-          </a:stretch>
-        </p:blipFill>
-        <p:spPr bwMode="auto">
-          <a:xfrm>
-            <a:off x="4791076" y="850952"/>
-            <a:ext cx="7305674" cy="5424462"/>
-          </a:xfrm>
-          <a:prstGeom prst="rect">
-            <a:avLst/>
-          </a:prstGeom>
-          <a:noFill/>
-          <a:extLst>
-            <a:ext uri="{909E8E84-426E-40DD-AFC4-6F175D3DCCD1}">
-              <a14:hiddenFill xmlns:a14="http://schemas.microsoft.com/office/drawing/2010/main">
-                <a:solidFill>
-                  <a:srgbClr val="FFFFFF"/>
-                </a:solidFill>
-              </a14:hiddenFill>
-            </a:ext>
-          </a:extLst>
-        </p:spPr>
-      </p:pic>
-    </p:spTree>
-    <p:extLst>
-      <p:ext uri="{BB962C8B-B14F-4D97-AF65-F5344CB8AC3E}">
-        <p14:creationId xmlns:p14="http://schemas.microsoft.com/office/powerpoint/2010/main" val="2246814802"/>
+        <p14:creationId xmlns:p14="http://schemas.microsoft.com/office/powerpoint/2010/main" val="2458911987"/>
       </p:ext>
     </p:extLst>
   </p:cSld>
@@ -22544,6 +22504,267 @@
 </a:theme>
 </file>
 
+<file path=ppt/theme/theme2.xml><?xml version="1.0" encoding="utf-8"?>
+<a:theme xmlns:a="http://schemas.openxmlformats.org/drawingml/2006/main" name="Motyw pakietu Office">
+  <a:themeElements>
+    <a:clrScheme name="Pakiet Office">
+      <a:dk1>
+        <a:sysClr val="windowText" lastClr="000000"/>
+      </a:dk1>
+      <a:lt1>
+        <a:sysClr val="window" lastClr="FFFFFF"/>
+      </a:lt1>
+      <a:dk2>
+        <a:srgbClr val="44546A"/>
+      </a:dk2>
+      <a:lt2>
+        <a:srgbClr val="E7E6E6"/>
+      </a:lt2>
+      <a:accent1>
+        <a:srgbClr val="5B9BD5"/>
+      </a:accent1>
+      <a:accent2>
+        <a:srgbClr val="ED7D31"/>
+      </a:accent2>
+      <a:accent3>
+        <a:srgbClr val="A5A5A5"/>
+      </a:accent3>
+      <a:accent4>
+        <a:srgbClr val="FFC000"/>
+      </a:accent4>
+      <a:accent5>
+        <a:srgbClr val="4472C4"/>
+      </a:accent5>
+      <a:accent6>
+        <a:srgbClr val="70AD47"/>
+      </a:accent6>
+      <a:hlink>
+        <a:srgbClr val="0563C1"/>
+      </a:hlink>
+      <a:folHlink>
+        <a:srgbClr val="954F72"/>
+      </a:folHlink>
+    </a:clrScheme>
+    <a:fontScheme name="Pakiet Office">
+      <a:majorFont>
+        <a:latin typeface="Calibri Light" panose="020F0302020204030204"/>
+        <a:ea typeface=""/>
+        <a:cs typeface=""/>
+        <a:font script="Jpan" typeface="ＭＳ Ｐゴシック"/>
+        <a:font script="Hang" typeface="맑은 고딕"/>
+        <a:font script="Hans" typeface="宋体"/>
+        <a:font script="Hant" typeface="新細明體"/>
+        <a:font script="Arab" typeface="Times New Roman"/>
+        <a:font script="Hebr" typeface="Times New Roman"/>
+        <a:font script="Thai" typeface="Angsana New"/>
+        <a:font script="Ethi" typeface="Nyala"/>
+        <a:font script="Beng" typeface="Vrinda"/>
+        <a:font script="Gujr" typeface="Shruti"/>
+        <a:font script="Khmr" typeface="MoolBoran"/>
+        <a:font script="Knda" typeface="Tunga"/>
+        <a:font script="Guru" typeface="Raavi"/>
+        <a:font script="Cans" typeface="Euphemia"/>
+        <a:font script="Cher" typeface="Plantagenet Cherokee"/>
+        <a:font script="Yiii" typeface="Microsoft Yi Baiti"/>
+        <a:font script="Tibt" typeface="Microsoft Himalaya"/>
+        <a:font script="Thaa" typeface="MV Boli"/>
+        <a:font script="Deva" typeface="Mangal"/>
+        <a:font script="Telu" typeface="Gautami"/>
+        <a:font script="Taml" typeface="Latha"/>
+        <a:font script="Syrc" typeface="Estrangelo Edessa"/>
+        <a:font script="Orya" typeface="Kalinga"/>
+        <a:font script="Mlym" typeface="Kartika"/>
+        <a:font script="Laoo" typeface="DokChampa"/>
+        <a:font script="Sinh" typeface="Iskoola Pota"/>
+        <a:font script="Mong" typeface="Mongolian Baiti"/>
+        <a:font script="Viet" typeface="Times New Roman"/>
+        <a:font script="Uigh" typeface="Microsoft Uighur"/>
+        <a:font script="Geor" typeface="Sylfaen"/>
+      </a:majorFont>
+      <a:minorFont>
+        <a:latin typeface="Calibri" panose="020F0502020204030204"/>
+        <a:ea typeface=""/>
+        <a:cs typeface=""/>
+        <a:font script="Jpan" typeface="ＭＳ Ｐゴシック"/>
+        <a:font script="Hang" typeface="맑은 고딕"/>
+        <a:font script="Hans" typeface="宋体"/>
+        <a:font script="Hant" typeface="新細明體"/>
+        <a:font script="Arab" typeface="Arial"/>
+        <a:font script="Hebr" typeface="Arial"/>
+        <a:font script="Thai" typeface="Cordia New"/>
+        <a:font script="Ethi" typeface="Nyala"/>
+        <a:font script="Beng" typeface="Vrinda"/>
+        <a:font script="Gujr" typeface="Shruti"/>
+        <a:font script="Khmr" typeface="DaunPenh"/>
+        <a:font script="Knda" typeface="Tunga"/>
+        <a:font script="Guru" typeface="Raavi"/>
+        <a:font script="Cans" typeface="Euphemia"/>
+        <a:font script="Cher" typeface="Plantagenet Cherokee"/>
+        <a:font script="Yiii" typeface="Microsoft Yi Baiti"/>
+        <a:font script="Tibt" typeface="Microsoft Himalaya"/>
+        <a:font script="Thaa" typeface="MV Boli"/>
+        <a:font script="Deva" typeface="Mangal"/>
+        <a:font script="Telu" typeface="Gautami"/>
+        <a:font script="Taml" typeface="Latha"/>
+        <a:font script="Syrc" typeface="Estrangelo Edessa"/>
+        <a:font script="Orya" typeface="Kalinga"/>
+        <a:font script="Mlym" typeface="Kartika"/>
+        <a:font script="Laoo" typeface="DokChampa"/>
+        <a:font script="Sinh" typeface="Iskoola Pota"/>
+        <a:font script="Mong" typeface="Mongolian Baiti"/>
+        <a:font script="Viet" typeface="Arial"/>
+        <a:font script="Uigh" typeface="Microsoft Uighur"/>
+        <a:font script="Geor" typeface="Sylfaen"/>
+      </a:minorFont>
+    </a:fontScheme>
+    <a:fmtScheme name="Pakiet Office">
+      <a:fillStyleLst>
+        <a:solidFill>
+          <a:schemeClr val="phClr"/>
+        </a:solidFill>
+        <a:gradFill rotWithShape="1">
+          <a:gsLst>
+            <a:gs pos="0">
+              <a:schemeClr val="phClr">
+                <a:lumMod val="110000"/>
+                <a:satMod val="105000"/>
+                <a:tint val="67000"/>
+              </a:schemeClr>
+            </a:gs>
+            <a:gs pos="50000">
+              <a:schemeClr val="phClr">
+                <a:lumMod val="105000"/>
+                <a:satMod val="103000"/>
+                <a:tint val="73000"/>
+              </a:schemeClr>
+            </a:gs>
+            <a:gs pos="100000">
+              <a:schemeClr val="phClr">
+                <a:lumMod val="105000"/>
+                <a:satMod val="109000"/>
+                <a:tint val="81000"/>
+              </a:schemeClr>
+            </a:gs>
+          </a:gsLst>
+          <a:lin ang="5400000" scaled="0"/>
+        </a:gradFill>
+        <a:gradFill rotWithShape="1">
+          <a:gsLst>
+            <a:gs pos="0">
+              <a:schemeClr val="phClr">
+                <a:satMod val="103000"/>
+                <a:lumMod val="102000"/>
+                <a:tint val="94000"/>
+              </a:schemeClr>
+            </a:gs>
+            <a:gs pos="50000">
+              <a:schemeClr val="phClr">
+                <a:satMod val="110000"/>
+                <a:lumMod val="100000"/>
+                <a:shade val="100000"/>
+              </a:schemeClr>
+            </a:gs>
+            <a:gs pos="100000">
+              <a:schemeClr val="phClr">
+                <a:lumMod val="99000"/>
+                <a:satMod val="120000"/>
+                <a:shade val="78000"/>
+              </a:schemeClr>
+            </a:gs>
+          </a:gsLst>
+          <a:lin ang="5400000" scaled="0"/>
+        </a:gradFill>
+      </a:fillStyleLst>
+      <a:lnStyleLst>
+        <a:ln w="6350" cap="flat" cmpd="sng" algn="ctr">
+          <a:solidFill>
+            <a:schemeClr val="phClr"/>
+          </a:solidFill>
+          <a:prstDash val="solid"/>
+          <a:miter lim="800000"/>
+        </a:ln>
+        <a:ln w="12700" cap="flat" cmpd="sng" algn="ctr">
+          <a:solidFill>
+            <a:schemeClr val="phClr"/>
+          </a:solidFill>
+          <a:prstDash val="solid"/>
+          <a:miter lim="800000"/>
+        </a:ln>
+        <a:ln w="19050" cap="flat" cmpd="sng" algn="ctr">
+          <a:solidFill>
+            <a:schemeClr val="phClr"/>
+          </a:solidFill>
+          <a:prstDash val="solid"/>
+          <a:miter lim="800000"/>
+        </a:ln>
+      </a:lnStyleLst>
+      <a:effectStyleLst>
+        <a:effectStyle>
+          <a:effectLst/>
+        </a:effectStyle>
+        <a:effectStyle>
+          <a:effectLst/>
+        </a:effectStyle>
+        <a:effectStyle>
+          <a:effectLst>
+            <a:outerShdw blurRad="57150" dist="19050" dir="5400000" algn="ctr" rotWithShape="0">
+              <a:srgbClr val="000000">
+                <a:alpha val="63000"/>
+              </a:srgbClr>
+            </a:outerShdw>
+          </a:effectLst>
+        </a:effectStyle>
+      </a:effectStyleLst>
+      <a:bgFillStyleLst>
+        <a:solidFill>
+          <a:schemeClr val="phClr"/>
+        </a:solidFill>
+        <a:solidFill>
+          <a:schemeClr val="phClr">
+            <a:tint val="95000"/>
+            <a:satMod val="170000"/>
+          </a:schemeClr>
+        </a:solidFill>
+        <a:gradFill rotWithShape="1">
+          <a:gsLst>
+            <a:gs pos="0">
+              <a:schemeClr val="phClr">
+                <a:tint val="93000"/>
+                <a:satMod val="150000"/>
+                <a:shade val="98000"/>
+                <a:lumMod val="102000"/>
+              </a:schemeClr>
+            </a:gs>
+            <a:gs pos="50000">
+              <a:schemeClr val="phClr">
+                <a:tint val="98000"/>
+                <a:satMod val="130000"/>
+                <a:shade val="90000"/>
+                <a:lumMod val="103000"/>
+              </a:schemeClr>
+            </a:gs>
+            <a:gs pos="100000">
+              <a:schemeClr val="phClr">
+                <a:shade val="63000"/>
+                <a:satMod val="120000"/>
+              </a:schemeClr>
+            </a:gs>
+          </a:gsLst>
+          <a:lin ang="5400000" scaled="0"/>
+        </a:gradFill>
+      </a:bgFillStyleLst>
+    </a:fmtScheme>
+  </a:themeElements>
+  <a:objectDefaults/>
+  <a:extraClrSchemeLst/>
+  <a:extLst>
+    <a:ext uri="{05A4C25C-085E-4340-85A3-A5531E510DB2}">
+      <thm15:themeFamily xmlns:thm15="http://schemas.microsoft.com/office/thememl/2012/main" name="Office Theme" id="{62F939B6-93AF-4DB8-9C6B-D6C7DFDC589F}" vid="{4A3C46E8-61CC-4603-A589-7422A47A8E4A}"/>
+    </a:ext>
+  </a:extLst>
+</a:theme>
+</file>
+
 <file path=customXml/item1.xml><?xml version="1.0" encoding="utf-8"?>
 <ct:contentTypeSchema xmlns:ct="http://schemas.microsoft.com/office/2006/metadata/contentType" xmlns:ma="http://schemas.microsoft.com/office/2006/metadata/properties/metaAttributes" ct:_="" ma:_="" ma:contentTypeName="Dokument" ma:contentTypeID="0x010100A9BECC9225AA224ABA259B10460EB390" ma:contentTypeVersion="5" ma:contentTypeDescription="Utwórz nowy dokument." ma:contentTypeScope="" ma:versionID="caae2e07e55b0868a33c46b7b7962801">
   <xsd:schema xmlns:xsd="http://www.w3.org/2001/XMLSchema" xmlns:xs="http://www.w3.org/2001/XMLSchema" xmlns:p="http://schemas.microsoft.com/office/2006/metadata/properties" xmlns:ns3="c8d71885-2d9c-4b0e-8156-30a4a404d7d7" targetNamespace="http://schemas.microsoft.com/office/2006/metadata/properties" ma:root="true" ma:fieldsID="f36e45ef3979bcbacacd849f6d749794" ns3:_="">
@@ -22695,20 +22916,20 @@
 </file>
 
 <file path=customXml/item2.xml><?xml version="1.0" encoding="utf-8"?>
+<p:properties xmlns:p="http://schemas.microsoft.com/office/2006/metadata/properties" xmlns:xsi="http://www.w3.org/2001/XMLSchema-instance" xmlns:pc="http://schemas.microsoft.com/office/infopath/2007/PartnerControls">
+  <documentManagement>
+    <_activity xmlns="c8d71885-2d9c-4b0e-8156-30a4a404d7d7" xsi:nil="true"/>
+  </documentManagement>
+</p:properties>
+</file>
+
+<file path=customXml/item3.xml><?xml version="1.0" encoding="utf-8"?>
 <?mso-contentType ?>
 <FormTemplates xmlns="http://schemas.microsoft.com/sharepoint/v3/contenttype/forms">
   <Display>DocumentLibraryForm</Display>
   <Edit>DocumentLibraryForm</Edit>
   <New>DocumentLibraryForm</New>
 </FormTemplates>
-</file>
-
-<file path=customXml/item3.xml><?xml version="1.0" encoding="utf-8"?>
-<p:properties xmlns:p="http://schemas.microsoft.com/office/2006/metadata/properties" xmlns:xsi="http://www.w3.org/2001/XMLSchema-instance" xmlns:pc="http://schemas.microsoft.com/office/infopath/2007/PartnerControls">
-  <documentManagement>
-    <_activity xmlns="c8d71885-2d9c-4b0e-8156-30a4a404d7d7" xsi:nil="true"/>
-  </documentManagement>
-</p:properties>
 </file>
 
 <file path=customXml/itemProps1.xml><?xml version="1.0" encoding="utf-8"?>
@@ -22730,25 +22951,25 @@
 </file>
 
 <file path=customXml/itemProps2.xml><?xml version="1.0" encoding="utf-8"?>
+<ds:datastoreItem xmlns:ds="http://schemas.openxmlformats.org/officeDocument/2006/customXml" ds:itemID="{92272B91-A8C5-44A9-BCFB-56B69F7EDD28}">
+  <ds:schemaRefs>
+    <ds:schemaRef ds:uri="http://purl.org/dc/terms/"/>
+    <ds:schemaRef ds:uri="http://schemas.microsoft.com/office/2006/documentManagement/types"/>
+    <ds:schemaRef ds:uri="http://purl.org/dc/dcmitype/"/>
+    <ds:schemaRef ds:uri="http://schemas.microsoft.com/office/infopath/2007/PartnerControls"/>
+    <ds:schemaRef ds:uri="http://purl.org/dc/elements/1.1/"/>
+    <ds:schemaRef ds:uri="http://schemas.microsoft.com/office/2006/metadata/properties"/>
+    <ds:schemaRef ds:uri="http://schemas.openxmlformats.org/package/2006/metadata/core-properties"/>
+    <ds:schemaRef ds:uri="c8d71885-2d9c-4b0e-8156-30a4a404d7d7"/>
+    <ds:schemaRef ds:uri="http://www.w3.org/XML/1998/namespace"/>
+  </ds:schemaRefs>
+</ds:datastoreItem>
+</file>
+
+<file path=customXml/itemProps3.xml><?xml version="1.0" encoding="utf-8"?>
 <ds:datastoreItem xmlns:ds="http://schemas.openxmlformats.org/officeDocument/2006/customXml" ds:itemID="{F23C5908-7AB3-4DDE-BE07-DF26B7C8FB73}">
   <ds:schemaRefs>
     <ds:schemaRef ds:uri="http://schemas.microsoft.com/sharepoint/v3/contenttype/forms"/>
   </ds:schemaRefs>
 </ds:datastoreItem>
-</file>
-
-<file path=customXml/itemProps3.xml><?xml version="1.0" encoding="utf-8"?>
-<ds:datastoreItem xmlns:ds="http://schemas.openxmlformats.org/officeDocument/2006/customXml" ds:itemID="{92272B91-A8C5-44A9-BCFB-56B69F7EDD28}">
-  <ds:schemaRefs>
-    <ds:schemaRef ds:uri="http://schemas.openxmlformats.org/package/2006/metadata/core-properties"/>
-    <ds:schemaRef ds:uri="http://www.w3.org/XML/1998/namespace"/>
-    <ds:schemaRef ds:uri="http://purl.org/dc/terms/"/>
-    <ds:schemaRef ds:uri="http://schemas.microsoft.com/office/2006/metadata/properties"/>
-    <ds:schemaRef ds:uri="http://schemas.microsoft.com/office/2006/documentManagement/types"/>
-    <ds:schemaRef ds:uri="http://purl.org/dc/elements/1.1/"/>
-    <ds:schemaRef ds:uri="http://purl.org/dc/dcmitype/"/>
-    <ds:schemaRef ds:uri="http://schemas.microsoft.com/office/infopath/2007/PartnerControls"/>
-    <ds:schemaRef ds:uri="c8d71885-2d9c-4b0e-8156-30a4a404d7d7"/>
-  </ds:schemaRefs>
-</ds:datastoreItem>
 </file>